--- a/exports/pptx/lessons/senior-module-03-ayurveda-good-health/day-03-tridosha.pptx
+++ b/exports/pptx/lessons/senior-module-03-ayurveda-good-health/day-03-tridosha.pptx
@@ -14,9 +14,15 @@
     <p:sldId id="262" r:id="rId8"/>
     <p:sldId id="263" r:id="rId9"/>
     <p:sldId id="264" r:id="rId10"/>
+    <p:sldId id="265" r:id="rId11"/>
+    <p:sldId id="266" r:id="rId12"/>
+    <p:sldId id="267" r:id="rId13"/>
+    <p:sldId id="268" r:id="rId14"/>
+    <p:sldId id="269" r:id="rId15"/>
+    <p:sldId id="270" r:id="rId16"/>
   </p:sldIdLst>
   <p:notesMasterIdLst>
-    <p:notesMasterId r:id="rId11"/>
+    <p:notesMasterId r:id="rId17"/>
   </p:notesMasterIdLst>
   <p:sldSz cx="9144000" cy="5143500"/>
   <p:notesSz cx="5143500" cy="9144000"/>
@@ -534,6 +540,534 @@
             <a:fld id="{F7021451-1387-4CA6-816F-3879F97B5CBC}" type="slidenum">
               <a:rPr lang="en-US"/>
               <a:t>1</a:t>
+            </a:fld>
+            <a:endParaRPr lang="en-US"/>
+          </a:p>
+        </p:txBody>
+      </p:sp>
+    </p:spTree>
+    <p:extLst>
+      <p:ext uri="{BB962C8B-B14F-4D97-AF65-F5344CB8AC3E}">
+        <p14:creationId xmlns:p14="http://schemas.microsoft.com/office/powerpoint/2010/main" val="1024086991"/>
+      </p:ext>
+    </p:extLst>
+  </p:cSld>
+  <p:clrMapOvr>
+    <a:masterClrMapping/>
+  </p:clrMapOvr>
+</p:notes>
+</file>
+
+<file path=ppt/notesSlides/notesSlide10.xml><?xml version="1.0" encoding="utf-8"?>
+<p:notes xmlns:a="http://schemas.openxmlformats.org/drawingml/2006/main" xmlns:r="http://schemas.openxmlformats.org/officeDocument/2006/relationships" xmlns:p="http://schemas.openxmlformats.org/presentationml/2006/main">
+  <p:cSld>
+    <p:spTree>
+      <p:nvGrpSpPr>
+        <p:cNvPr id="1" name=""/>
+        <p:cNvGrpSpPr/>
+        <p:nvPr/>
+      </p:nvGrpSpPr>
+      <p:grpSpPr>
+        <a:xfrm>
+          <a:off x="0" y="0"/>
+          <a:ext cx="0" cy="0"/>
+          <a:chOff x="0" y="0"/>
+          <a:chExt cx="0" cy="0"/>
+        </a:xfrm>
+      </p:grpSpPr>
+      <p:sp>
+        <p:nvSpPr>
+          <p:cNvPr id="2" name="Slide Image Placeholder 1"/>
+          <p:cNvSpPr>
+            <a:spLocks noGrp="1" noRot="1" noChangeAspect="1"/>
+          </p:cNvSpPr>
+          <p:nvPr>
+            <p:ph type="sldImg"/>
+          </p:nvPr>
+        </p:nvSpPr>
+        <p:spPr/>
+      </p:sp>
+      <p:sp>
+        <p:nvSpPr>
+          <p:cNvPr id="3" name="Notes Placeholder 2"/>
+          <p:cNvSpPr>
+            <a:spLocks noGrp="1"/>
+          </p:cNvSpPr>
+          <p:nvPr>
+            <p:ph type="body" idx="1"/>
+          </p:nvPr>
+        </p:nvSpPr>
+        <p:spPr/>
+        <p:txBody>
+          <a:bodyPr/>
+          <a:lstStyle/>
+          <a:p>
+            <a:r>
+              <a:rPr lang="en-US" dirty="0"/>
+              <a:t/>
+            </a:r>
+            <a:endParaRPr lang="en-US" dirty="0"/>
+          </a:p>
+        </p:txBody>
+      </p:sp>
+      <p:sp>
+        <p:nvSpPr>
+          <p:cNvPr id="4" name="Slide Number Placeholder 3"/>
+          <p:cNvSpPr>
+            <a:spLocks noGrp="1"/>
+          </p:cNvSpPr>
+          <p:nvPr>
+            <p:ph type="sldNum" sz="quarter" idx="10"/>
+          </p:nvPr>
+        </p:nvSpPr>
+        <p:spPr/>
+        <p:txBody>
+          <a:bodyPr/>
+          <a:lstStyle/>
+          <a:p>
+            <a:fld id="{F7021451-1387-4CA6-816F-3879F97B5CBC}" type="slidenum">
+              <a:rPr lang="en-US"/>
+              <a:t>10</a:t>
+            </a:fld>
+            <a:endParaRPr lang="en-US"/>
+          </a:p>
+        </p:txBody>
+      </p:sp>
+    </p:spTree>
+    <p:extLst>
+      <p:ext uri="{BB962C8B-B14F-4D97-AF65-F5344CB8AC3E}">
+        <p14:creationId xmlns:p14="http://schemas.microsoft.com/office/powerpoint/2010/main" val="1024086991"/>
+      </p:ext>
+    </p:extLst>
+  </p:cSld>
+  <p:clrMapOvr>
+    <a:masterClrMapping/>
+  </p:clrMapOvr>
+</p:notes>
+</file>
+
+<file path=ppt/notesSlides/notesSlide11.xml><?xml version="1.0" encoding="utf-8"?>
+<p:notes xmlns:a="http://schemas.openxmlformats.org/drawingml/2006/main" xmlns:r="http://schemas.openxmlformats.org/officeDocument/2006/relationships" xmlns:p="http://schemas.openxmlformats.org/presentationml/2006/main">
+  <p:cSld>
+    <p:spTree>
+      <p:nvGrpSpPr>
+        <p:cNvPr id="1" name=""/>
+        <p:cNvGrpSpPr/>
+        <p:nvPr/>
+      </p:nvGrpSpPr>
+      <p:grpSpPr>
+        <a:xfrm>
+          <a:off x="0" y="0"/>
+          <a:ext cx="0" cy="0"/>
+          <a:chOff x="0" y="0"/>
+          <a:chExt cx="0" cy="0"/>
+        </a:xfrm>
+      </p:grpSpPr>
+      <p:sp>
+        <p:nvSpPr>
+          <p:cNvPr id="2" name="Slide Image Placeholder 1"/>
+          <p:cNvSpPr>
+            <a:spLocks noGrp="1" noRot="1" noChangeAspect="1"/>
+          </p:cNvSpPr>
+          <p:nvPr>
+            <p:ph type="sldImg"/>
+          </p:nvPr>
+        </p:nvSpPr>
+        <p:spPr/>
+      </p:sp>
+      <p:sp>
+        <p:nvSpPr>
+          <p:cNvPr id="3" name="Notes Placeholder 2"/>
+          <p:cNvSpPr>
+            <a:spLocks noGrp="1"/>
+          </p:cNvSpPr>
+          <p:nvPr>
+            <p:ph type="body" idx="1"/>
+          </p:nvPr>
+        </p:nvSpPr>
+        <p:spPr/>
+        <p:txBody>
+          <a:bodyPr/>
+          <a:lstStyle/>
+          <a:p>
+            <a:r>
+              <a:rPr lang="en-US" dirty="0"/>
+              <a:t/>
+            </a:r>
+            <a:endParaRPr lang="en-US" dirty="0"/>
+          </a:p>
+        </p:txBody>
+      </p:sp>
+      <p:sp>
+        <p:nvSpPr>
+          <p:cNvPr id="4" name="Slide Number Placeholder 3"/>
+          <p:cNvSpPr>
+            <a:spLocks noGrp="1"/>
+          </p:cNvSpPr>
+          <p:nvPr>
+            <p:ph type="sldNum" sz="quarter" idx="10"/>
+          </p:nvPr>
+        </p:nvSpPr>
+        <p:spPr/>
+        <p:txBody>
+          <a:bodyPr/>
+          <a:lstStyle/>
+          <a:p>
+            <a:fld id="{F7021451-1387-4CA6-816F-3879F97B5CBC}" type="slidenum">
+              <a:rPr lang="en-US"/>
+              <a:t>11</a:t>
+            </a:fld>
+            <a:endParaRPr lang="en-US"/>
+          </a:p>
+        </p:txBody>
+      </p:sp>
+    </p:spTree>
+    <p:extLst>
+      <p:ext uri="{BB962C8B-B14F-4D97-AF65-F5344CB8AC3E}">
+        <p14:creationId xmlns:p14="http://schemas.microsoft.com/office/powerpoint/2010/main" val="1024086991"/>
+      </p:ext>
+    </p:extLst>
+  </p:cSld>
+  <p:clrMapOvr>
+    <a:masterClrMapping/>
+  </p:clrMapOvr>
+</p:notes>
+</file>
+
+<file path=ppt/notesSlides/notesSlide12.xml><?xml version="1.0" encoding="utf-8"?>
+<p:notes xmlns:a="http://schemas.openxmlformats.org/drawingml/2006/main" xmlns:r="http://schemas.openxmlformats.org/officeDocument/2006/relationships" xmlns:p="http://schemas.openxmlformats.org/presentationml/2006/main">
+  <p:cSld>
+    <p:spTree>
+      <p:nvGrpSpPr>
+        <p:cNvPr id="1" name=""/>
+        <p:cNvGrpSpPr/>
+        <p:nvPr/>
+      </p:nvGrpSpPr>
+      <p:grpSpPr>
+        <a:xfrm>
+          <a:off x="0" y="0"/>
+          <a:ext cx="0" cy="0"/>
+          <a:chOff x="0" y="0"/>
+          <a:chExt cx="0" cy="0"/>
+        </a:xfrm>
+      </p:grpSpPr>
+      <p:sp>
+        <p:nvSpPr>
+          <p:cNvPr id="2" name="Slide Image Placeholder 1"/>
+          <p:cNvSpPr>
+            <a:spLocks noGrp="1" noRot="1" noChangeAspect="1"/>
+          </p:cNvSpPr>
+          <p:nvPr>
+            <p:ph type="sldImg"/>
+          </p:nvPr>
+        </p:nvSpPr>
+        <p:spPr/>
+      </p:sp>
+      <p:sp>
+        <p:nvSpPr>
+          <p:cNvPr id="3" name="Notes Placeholder 2"/>
+          <p:cNvSpPr>
+            <a:spLocks noGrp="1"/>
+          </p:cNvSpPr>
+          <p:nvPr>
+            <p:ph type="body" idx="1"/>
+          </p:nvPr>
+        </p:nvSpPr>
+        <p:spPr/>
+        <p:txBody>
+          <a:bodyPr/>
+          <a:lstStyle/>
+          <a:p>
+            <a:r>
+              <a:rPr lang="en-US" dirty="0"/>
+              <a:t/>
+            </a:r>
+            <a:endParaRPr lang="en-US" dirty="0"/>
+          </a:p>
+        </p:txBody>
+      </p:sp>
+      <p:sp>
+        <p:nvSpPr>
+          <p:cNvPr id="4" name="Slide Number Placeholder 3"/>
+          <p:cNvSpPr>
+            <a:spLocks noGrp="1"/>
+          </p:cNvSpPr>
+          <p:nvPr>
+            <p:ph type="sldNum" sz="quarter" idx="10"/>
+          </p:nvPr>
+        </p:nvSpPr>
+        <p:spPr/>
+        <p:txBody>
+          <a:bodyPr/>
+          <a:lstStyle/>
+          <a:p>
+            <a:fld id="{F7021451-1387-4CA6-816F-3879F97B5CBC}" type="slidenum">
+              <a:rPr lang="en-US"/>
+              <a:t>12</a:t>
+            </a:fld>
+            <a:endParaRPr lang="en-US"/>
+          </a:p>
+        </p:txBody>
+      </p:sp>
+    </p:spTree>
+    <p:extLst>
+      <p:ext uri="{BB962C8B-B14F-4D97-AF65-F5344CB8AC3E}">
+        <p14:creationId xmlns:p14="http://schemas.microsoft.com/office/powerpoint/2010/main" val="1024086991"/>
+      </p:ext>
+    </p:extLst>
+  </p:cSld>
+  <p:clrMapOvr>
+    <a:masterClrMapping/>
+  </p:clrMapOvr>
+</p:notes>
+</file>
+
+<file path=ppt/notesSlides/notesSlide13.xml><?xml version="1.0" encoding="utf-8"?>
+<p:notes xmlns:a="http://schemas.openxmlformats.org/drawingml/2006/main" xmlns:r="http://schemas.openxmlformats.org/officeDocument/2006/relationships" xmlns:p="http://schemas.openxmlformats.org/presentationml/2006/main">
+  <p:cSld>
+    <p:spTree>
+      <p:nvGrpSpPr>
+        <p:cNvPr id="1" name=""/>
+        <p:cNvGrpSpPr/>
+        <p:nvPr/>
+      </p:nvGrpSpPr>
+      <p:grpSpPr>
+        <a:xfrm>
+          <a:off x="0" y="0"/>
+          <a:ext cx="0" cy="0"/>
+          <a:chOff x="0" y="0"/>
+          <a:chExt cx="0" cy="0"/>
+        </a:xfrm>
+      </p:grpSpPr>
+      <p:sp>
+        <p:nvSpPr>
+          <p:cNvPr id="2" name="Slide Image Placeholder 1"/>
+          <p:cNvSpPr>
+            <a:spLocks noGrp="1" noRot="1" noChangeAspect="1"/>
+          </p:cNvSpPr>
+          <p:nvPr>
+            <p:ph type="sldImg"/>
+          </p:nvPr>
+        </p:nvSpPr>
+        <p:spPr/>
+      </p:sp>
+      <p:sp>
+        <p:nvSpPr>
+          <p:cNvPr id="3" name="Notes Placeholder 2"/>
+          <p:cNvSpPr>
+            <a:spLocks noGrp="1"/>
+          </p:cNvSpPr>
+          <p:nvPr>
+            <p:ph type="body" idx="1"/>
+          </p:nvPr>
+        </p:nvSpPr>
+        <p:spPr/>
+        <p:txBody>
+          <a:bodyPr/>
+          <a:lstStyle/>
+          <a:p>
+            <a:r>
+              <a:rPr lang="en-US" dirty="0"/>
+              <a:t/>
+            </a:r>
+            <a:endParaRPr lang="en-US" dirty="0"/>
+          </a:p>
+        </p:txBody>
+      </p:sp>
+      <p:sp>
+        <p:nvSpPr>
+          <p:cNvPr id="4" name="Slide Number Placeholder 3"/>
+          <p:cNvSpPr>
+            <a:spLocks noGrp="1"/>
+          </p:cNvSpPr>
+          <p:nvPr>
+            <p:ph type="sldNum" sz="quarter" idx="10"/>
+          </p:nvPr>
+        </p:nvSpPr>
+        <p:spPr/>
+        <p:txBody>
+          <a:bodyPr/>
+          <a:lstStyle/>
+          <a:p>
+            <a:fld id="{F7021451-1387-4CA6-816F-3879F97B5CBC}" type="slidenum">
+              <a:rPr lang="en-US"/>
+              <a:t>13</a:t>
+            </a:fld>
+            <a:endParaRPr lang="en-US"/>
+          </a:p>
+        </p:txBody>
+      </p:sp>
+    </p:spTree>
+    <p:extLst>
+      <p:ext uri="{BB962C8B-B14F-4D97-AF65-F5344CB8AC3E}">
+        <p14:creationId xmlns:p14="http://schemas.microsoft.com/office/powerpoint/2010/main" val="1024086991"/>
+      </p:ext>
+    </p:extLst>
+  </p:cSld>
+  <p:clrMapOvr>
+    <a:masterClrMapping/>
+  </p:clrMapOvr>
+</p:notes>
+</file>
+
+<file path=ppt/notesSlides/notesSlide14.xml><?xml version="1.0" encoding="utf-8"?>
+<p:notes xmlns:a="http://schemas.openxmlformats.org/drawingml/2006/main" xmlns:r="http://schemas.openxmlformats.org/officeDocument/2006/relationships" xmlns:p="http://schemas.openxmlformats.org/presentationml/2006/main">
+  <p:cSld>
+    <p:spTree>
+      <p:nvGrpSpPr>
+        <p:cNvPr id="1" name=""/>
+        <p:cNvGrpSpPr/>
+        <p:nvPr/>
+      </p:nvGrpSpPr>
+      <p:grpSpPr>
+        <a:xfrm>
+          <a:off x="0" y="0"/>
+          <a:ext cx="0" cy="0"/>
+          <a:chOff x="0" y="0"/>
+          <a:chExt cx="0" cy="0"/>
+        </a:xfrm>
+      </p:grpSpPr>
+      <p:sp>
+        <p:nvSpPr>
+          <p:cNvPr id="2" name="Slide Image Placeholder 1"/>
+          <p:cNvSpPr>
+            <a:spLocks noGrp="1" noRot="1" noChangeAspect="1"/>
+          </p:cNvSpPr>
+          <p:nvPr>
+            <p:ph type="sldImg"/>
+          </p:nvPr>
+        </p:nvSpPr>
+        <p:spPr/>
+      </p:sp>
+      <p:sp>
+        <p:nvSpPr>
+          <p:cNvPr id="3" name="Notes Placeholder 2"/>
+          <p:cNvSpPr>
+            <a:spLocks noGrp="1"/>
+          </p:cNvSpPr>
+          <p:nvPr>
+            <p:ph type="body" idx="1"/>
+          </p:nvPr>
+        </p:nvSpPr>
+        <p:spPr/>
+        <p:txBody>
+          <a:bodyPr/>
+          <a:lstStyle/>
+          <a:p>
+            <a:r>
+              <a:rPr lang="en-US" dirty="0"/>
+              <a:t/>
+            </a:r>
+            <a:endParaRPr lang="en-US" dirty="0"/>
+          </a:p>
+        </p:txBody>
+      </p:sp>
+      <p:sp>
+        <p:nvSpPr>
+          <p:cNvPr id="4" name="Slide Number Placeholder 3"/>
+          <p:cNvSpPr>
+            <a:spLocks noGrp="1"/>
+          </p:cNvSpPr>
+          <p:nvPr>
+            <p:ph type="sldNum" sz="quarter" idx="10"/>
+          </p:nvPr>
+        </p:nvSpPr>
+        <p:spPr/>
+        <p:txBody>
+          <a:bodyPr/>
+          <a:lstStyle/>
+          <a:p>
+            <a:fld id="{F7021451-1387-4CA6-816F-3879F97B5CBC}" type="slidenum">
+              <a:rPr lang="en-US"/>
+              <a:t>14</a:t>
+            </a:fld>
+            <a:endParaRPr lang="en-US"/>
+          </a:p>
+        </p:txBody>
+      </p:sp>
+    </p:spTree>
+    <p:extLst>
+      <p:ext uri="{BB962C8B-B14F-4D97-AF65-F5344CB8AC3E}">
+        <p14:creationId xmlns:p14="http://schemas.microsoft.com/office/powerpoint/2010/main" val="1024086991"/>
+      </p:ext>
+    </p:extLst>
+  </p:cSld>
+  <p:clrMapOvr>
+    <a:masterClrMapping/>
+  </p:clrMapOvr>
+</p:notes>
+</file>
+
+<file path=ppt/notesSlides/notesSlide15.xml><?xml version="1.0" encoding="utf-8"?>
+<p:notes xmlns:a="http://schemas.openxmlformats.org/drawingml/2006/main" xmlns:r="http://schemas.openxmlformats.org/officeDocument/2006/relationships" xmlns:p="http://schemas.openxmlformats.org/presentationml/2006/main">
+  <p:cSld>
+    <p:spTree>
+      <p:nvGrpSpPr>
+        <p:cNvPr id="1" name=""/>
+        <p:cNvGrpSpPr/>
+        <p:nvPr/>
+      </p:nvGrpSpPr>
+      <p:grpSpPr>
+        <a:xfrm>
+          <a:off x="0" y="0"/>
+          <a:ext cx="0" cy="0"/>
+          <a:chOff x="0" y="0"/>
+          <a:chExt cx="0" cy="0"/>
+        </a:xfrm>
+      </p:grpSpPr>
+      <p:sp>
+        <p:nvSpPr>
+          <p:cNvPr id="2" name="Slide Image Placeholder 1"/>
+          <p:cNvSpPr>
+            <a:spLocks noGrp="1" noRot="1" noChangeAspect="1"/>
+          </p:cNvSpPr>
+          <p:nvPr>
+            <p:ph type="sldImg"/>
+          </p:nvPr>
+        </p:nvSpPr>
+        <p:spPr/>
+      </p:sp>
+      <p:sp>
+        <p:nvSpPr>
+          <p:cNvPr id="3" name="Notes Placeholder 2"/>
+          <p:cNvSpPr>
+            <a:spLocks noGrp="1"/>
+          </p:cNvSpPr>
+          <p:nvPr>
+            <p:ph type="body" idx="1"/>
+          </p:nvPr>
+        </p:nvSpPr>
+        <p:spPr/>
+        <p:txBody>
+          <a:bodyPr/>
+          <a:lstStyle/>
+          <a:p>
+            <a:r>
+              <a:rPr lang="en-US" dirty="0"/>
+              <a:t/>
+            </a:r>
+            <a:endParaRPr lang="en-US" dirty="0"/>
+          </a:p>
+        </p:txBody>
+      </p:sp>
+      <p:sp>
+        <p:nvSpPr>
+          <p:cNvPr id="4" name="Slide Number Placeholder 3"/>
+          <p:cNvSpPr>
+            <a:spLocks noGrp="1"/>
+          </p:cNvSpPr>
+          <p:nvPr>
+            <p:ph type="sldNum" sz="quarter" idx="10"/>
+          </p:nvPr>
+        </p:nvSpPr>
+        <p:spPr/>
+        <p:txBody>
+          <a:bodyPr/>
+          <a:lstStyle/>
+          <a:p>
+            <a:fld id="{F7021451-1387-4CA6-816F-3879F97B5CBC}" type="slidenum">
+              <a:rPr lang="en-US"/>
+              <a:t>15</a:t>
             </a:fld>
             <a:endParaRPr lang="en-US"/>
           </a:p>
@@ -1787,7 +2321,117 @@
         </p:nvSpPr>
         <p:spPr>
           <a:xfrm>
-            <a:off x="406301" y="1223963"/>
+            <a:off x="406301" y="4434929"/>
+            <a:ext cx="8498026" cy="213271"/>
+          </a:xfrm>
+          <a:prstGeom prst="rect">
+            <a:avLst/>
+          </a:prstGeom>
+          <a:noFill/>
+          <a:ln/>
+        </p:spPr>
+        <p:txBody>
+          <a:bodyPr wrap="square" lIns="0" tIns="0" rIns="0" bIns="0" rtlCol="0" anchor="t"/>
+          <a:lstStyle/>
+          <a:p>
+            <a:pPr algn="l" indent="0" marL="0">
+              <a:lnSpc>
+                <a:spcPts val="1680"/>
+              </a:lnSpc>
+              <a:spcBef>
+                <a:spcPts val="300"/>
+              </a:spcBef>
+              <a:spcAft>
+                <a:spcPts val="300"/>
+              </a:spcAft>
+              <a:buNone/>
+            </a:pPr>
+            <a:r>
+              <a:rPr lang="en-US" sz="1200" dirty="0">
+                <a:solidFill>
+                  <a:srgbClr val="1A1A1A"/>
+                </a:solidFill>
+                <a:latin typeface="Georgia" pitchFamily="34" charset="0"/>
+                <a:ea typeface="Georgia" pitchFamily="34" charset="-122"/>
+                <a:cs typeface="Georgia" pitchFamily="34" charset="-120"/>
+              </a:rPr>
+              <a:t>Senior ·  · IKS Curriculum</a:t>
+            </a:r>
+            <a:endParaRPr lang="en-US" sz="1200" dirty="0"/>
+          </a:p>
+        </p:txBody>
+      </p:sp>
+    </p:spTree>
+  </p:cSld>
+  <p:clrMapOvr>
+    <a:masterClrMapping/>
+  </p:clrMapOvr>
+</p:sld>
+</file>
+
+<file path=ppt/slides/slide10.xml><?xml version="1.0" encoding="utf-8"?>
+<p:sld xmlns:a="http://schemas.openxmlformats.org/drawingml/2006/main" xmlns:r="http://schemas.openxmlformats.org/officeDocument/2006/relationships" xmlns:p="http://schemas.openxmlformats.org/presentationml/2006/main">
+  <p:cSld name="Slide 10">
+    <p:bg>
+      <p:bgPr>
+        <a:solidFill>
+          <a:srgbClr val="FAF7F2"/>
+        </a:solidFill>
+      </p:bgPr>
+    </p:bg>
+    <p:spTree>
+      <p:nvGrpSpPr>
+        <p:cNvPr id="1" name=""/>
+        <p:cNvGrpSpPr/>
+        <p:nvPr/>
+      </p:nvGrpSpPr>
+      <p:grpSpPr>
+        <a:xfrm>
+          <a:off x="0" y="0"/>
+          <a:ext cx="0" cy="0"/>
+          <a:chOff x="0" y="0"/>
+          <a:chExt cx="0" cy="0"/>
+        </a:xfrm>
+      </p:grpSpPr>
+      <p:sp>
+        <p:nvSpPr>
+          <p:cNvPr id="2" name="Text 0"/>
+          <p:cNvSpPr/>
+          <p:nvPr/>
+        </p:nvSpPr>
+        <p:spPr>
+          <a:xfrm>
+            <a:off x="0" y="0"/>
+            <a:ext cx="9144000" cy="101501"/>
+          </a:xfrm>
+          <a:prstGeom prst="rect">
+            <a:avLst/>
+          </a:prstGeom>
+          <a:solidFill>
+            <a:srgbClr val="5D1D2E"/>
+          </a:solidFill>
+          <a:ln/>
+        </p:spPr>
+        <p:txBody>
+          <a:bodyPr wrap="square" rtlCol="0" anchor="ctr"/>
+          <a:lstStyle/>
+          <a:p>
+            <a:pPr indent="0" marL="0">
+              <a:buNone/>
+            </a:pPr>
+            <a:endParaRPr lang="en-US" dirty="0"/>
+          </a:p>
+        </p:txBody>
+      </p:sp>
+      <p:sp>
+        <p:nvSpPr>
+          <p:cNvPr id="3" name="Text 1"/>
+          <p:cNvSpPr/>
+          <p:nvPr/>
+        </p:nvSpPr>
+        <p:spPr>
+          <a:xfrm>
+            <a:off x="406301" y="457051"/>
             <a:ext cx="8498026" cy="274290"/>
           </a:xfrm>
           <a:prstGeom prst="rect">
@@ -1821,7 +2465,7 @@
                 <a:ea typeface="Times New Roman" pitchFamily="34" charset="-122"/>
                 <a:cs typeface="Times New Roman" pitchFamily="34" charset="-120"/>
               </a:rPr>
-              <a:t>Learning objective</a:t>
+              <a:t>Core (25 min) (cont.)</a:t>
             </a:r>
             <a:endParaRPr lang="en-US" sz="1800" dirty="0"/>
           </a:p>
@@ -1829,14 +2473,14 @@
       </p:sp>
       <p:sp>
         <p:nvSpPr>
-          <p:cNvPr id="6" name="Text 4"/>
+          <p:cNvPr id="4" name="Text 2"/>
           <p:cNvSpPr/>
           <p:nvPr/>
         </p:nvSpPr>
         <p:spPr>
           <a:xfrm>
-            <a:off x="406301" y="1637854"/>
-            <a:ext cx="8498026" cy="426541"/>
+            <a:off x="634901" y="883593"/>
+            <a:ext cx="8102798" cy="487561"/>
           </a:xfrm>
           <a:prstGeom prst="rect">
             <a:avLst/>
@@ -1848,8 +2492,154 @@
           <a:bodyPr wrap="square" lIns="0" tIns="0" rIns="0" bIns="0" rtlCol="0" anchor="t"/>
           <a:lstStyle/>
           <a:p>
+            <a:pPr algn="l" marL="342900" indent="-342900">
+              <a:lnSpc>
+                <a:spcPts val="1620"/>
+              </a:lnSpc>
+              <a:spcAft>
+                <a:spcPts val="300"/>
+              </a:spcAft>
+              <a:buSzPct val="100000"/>
+              <a:buChar char="•"/>
+            </a:pPr>
+            <a:r>
+              <a:rPr lang="en-US" sz="1200" b="1" dirty="0">
+                <a:solidFill>
+                  <a:srgbClr val="1A1A1A"/>
+                </a:solidFill>
+                <a:latin typeface="Georgia" pitchFamily="34" charset="0"/>
+                <a:ea typeface="Georgia" pitchFamily="34" charset="-122"/>
+                <a:cs typeface="Georgia" pitchFamily="34" charset="-120"/>
+              </a:rPr>
+              <a:t>The honest framing:</a:t>
+            </a:r>
             <a:pPr algn="l" indent="0" marL="0">
               <a:lnSpc>
+                <a:spcPts val="1620"/>
+              </a:lnSpc>
+              <a:spcAft>
+                <a:spcPts val="300"/>
+              </a:spcAft>
+              <a:buNone/>
+            </a:pPr>
+            <a:r>
+              <a:rPr lang="en-US" sz="1200" dirty="0">
+                <a:solidFill>
+                  <a:srgbClr val="1A1A1A"/>
+                </a:solidFill>
+                <a:latin typeface="Georgia" pitchFamily="34" charset="0"/>
+                <a:ea typeface="Georgia" pitchFamily="34" charset="-122"/>
+                <a:cs typeface="Georgia" pitchFamily="34" charset="-120"/>
+              </a:rPr>
+              <a:t> the Tridosha framework is </a:t>
+            </a:r>
+            <a:pPr algn="l" indent="0" marL="0">
+              <a:lnSpc>
+                <a:spcPts val="1620"/>
+              </a:lnSpc>
+              <a:spcAft>
+                <a:spcPts val="300"/>
+              </a:spcAft>
+              <a:buNone/>
+            </a:pPr>
+            <a:r>
+              <a:rPr lang="en-US" sz="1200" i="1" dirty="0">
+                <a:solidFill>
+                  <a:srgbClr val="1A1A1A"/>
+                </a:solidFill>
+                <a:latin typeface="Georgia" pitchFamily="34" charset="0"/>
+                <a:ea typeface="Georgia" pitchFamily="34" charset="-122"/>
+                <a:cs typeface="Georgia" pitchFamily="34" charset="-120"/>
+              </a:rPr>
+              <a:t>useful</a:t>
+            </a:r>
+            <a:pPr algn="l" indent="0" marL="0">
+              <a:lnSpc>
+                <a:spcPts val="1620"/>
+              </a:lnSpc>
+              <a:spcAft>
+                <a:spcPts val="300"/>
+              </a:spcAft>
+              <a:buNone/>
+            </a:pPr>
+            <a:r>
+              <a:rPr lang="en-US" sz="1200" dirty="0">
+                <a:solidFill>
+                  <a:srgbClr val="1A1A1A"/>
+                </a:solidFill>
+                <a:latin typeface="Georgia" pitchFamily="34" charset="0"/>
+                <a:ea typeface="Georgia" pitchFamily="34" charset="-122"/>
+                <a:cs typeface="Georgia" pitchFamily="34" charset="-120"/>
+              </a:rPr>
+              <a:t> clinically for many practitioners. The </a:t>
+            </a:r>
+            <a:pPr algn="l" indent="0" marL="0">
+              <a:lnSpc>
+                <a:spcPts val="1620"/>
+              </a:lnSpc>
+              <a:spcAft>
+                <a:spcPts val="300"/>
+              </a:spcAft>
+              <a:buNone/>
+            </a:pPr>
+            <a:r>
+              <a:rPr lang="en-US" sz="1200" i="1" dirty="0">
+                <a:solidFill>
+                  <a:srgbClr val="1A1A1A"/>
+                </a:solidFill>
+                <a:latin typeface="Georgia" pitchFamily="34" charset="0"/>
+                <a:ea typeface="Georgia" pitchFamily="34" charset="-122"/>
+                <a:cs typeface="Georgia" pitchFamily="34" charset="-120"/>
+              </a:rPr>
+              <a:t>biomedical-classification</a:t>
+            </a:r>
+            <a:pPr algn="l" indent="0" marL="0">
+              <a:lnSpc>
+                <a:spcPts val="1620"/>
+              </a:lnSpc>
+              <a:spcAft>
+                <a:spcPts val="300"/>
+              </a:spcAft>
+              <a:buNone/>
+            </a:pPr>
+            <a:r>
+              <a:rPr lang="en-US" sz="1200" dirty="0">
+                <a:solidFill>
+                  <a:srgbClr val="1A1A1A"/>
+                </a:solidFill>
+                <a:latin typeface="Georgia" pitchFamily="34" charset="0"/>
+                <a:ea typeface="Georgia" pitchFamily="34" charset="-122"/>
+                <a:cs typeface="Georgia" pitchFamily="34" charset="-120"/>
+              </a:rPr>
+              <a:t> claim has mixed evidence. These are different claims. Don't conflate.</a:t>
+            </a:r>
+            <a:endParaRPr lang="en-US" sz="1200" dirty="0"/>
+          </a:p>
+        </p:txBody>
+      </p:sp>
+      <p:sp>
+        <p:nvSpPr>
+          <p:cNvPr id="5" name="Text 3"/>
+          <p:cNvSpPr/>
+          <p:nvPr/>
+        </p:nvSpPr>
+        <p:spPr>
+          <a:xfrm>
+            <a:off x="406301" y="4434929"/>
+            <a:ext cx="8498026" cy="213271"/>
+          </a:xfrm>
+          <a:prstGeom prst="rect">
+            <a:avLst/>
+          </a:prstGeom>
+          <a:noFill/>
+          <a:ln/>
+        </p:spPr>
+        <p:txBody>
+          <a:bodyPr wrap="square" lIns="0" tIns="0" rIns="0" bIns="0" rtlCol="0" anchor="t"/>
+          <a:lstStyle/>
+          <a:p>
+            <a:pPr algn="l" indent="0" marL="0">
+              <a:lnSpc>
                 <a:spcPts val="1680"/>
               </a:lnSpc>
               <a:spcBef>
@@ -1869,15 +2659,1207 @@
                 <a:ea typeface="Georgia" pitchFamily="34" charset="-122"/>
                 <a:cs typeface="Georgia" pitchFamily="34" charset="-120"/>
               </a:rPr>
-              <a:t>Students articulate the Tridosha framework at classical depth + engage with the modern scholarly literature on its biomedical validity.</a:t>
+              <a:t>Senior ·  · IKS Curriculum</a:t>
             </a:r>
             <a:endParaRPr lang="en-US" sz="1200" dirty="0"/>
           </a:p>
         </p:txBody>
       </p:sp>
-      <p:sp>
-        <p:nvSpPr>
-          <p:cNvPr id="7" name="Text 5"/>
+    </p:spTree>
+  </p:cSld>
+  <p:clrMapOvr>
+    <a:masterClrMapping/>
+  </p:clrMapOvr>
+</p:sld>
+</file>
+
+<file path=ppt/slides/slide11.xml><?xml version="1.0" encoding="utf-8"?>
+<p:sld xmlns:a="http://schemas.openxmlformats.org/drawingml/2006/main" xmlns:r="http://schemas.openxmlformats.org/officeDocument/2006/relationships" xmlns:p="http://schemas.openxmlformats.org/presentationml/2006/main">
+  <p:cSld name="Slide 11">
+    <p:bg>
+      <p:bgPr>
+        <a:solidFill>
+          <a:srgbClr val="FAF7F2"/>
+        </a:solidFill>
+      </p:bgPr>
+    </p:bg>
+    <p:spTree>
+      <p:nvGrpSpPr>
+        <p:cNvPr id="1" name=""/>
+        <p:cNvGrpSpPr/>
+        <p:nvPr/>
+      </p:nvGrpSpPr>
+      <p:grpSpPr>
+        <a:xfrm>
+          <a:off x="0" y="0"/>
+          <a:ext cx="0" cy="0"/>
+          <a:chOff x="0" y="0"/>
+          <a:chExt cx="0" cy="0"/>
+        </a:xfrm>
+      </p:grpSpPr>
+      <p:sp>
+        <p:nvSpPr>
+          <p:cNvPr id="2" name="Text 0"/>
+          <p:cNvSpPr/>
+          <p:nvPr/>
+        </p:nvSpPr>
+        <p:spPr>
+          <a:xfrm>
+            <a:off x="0" y="0"/>
+            <a:ext cx="9144000" cy="101501"/>
+          </a:xfrm>
+          <a:prstGeom prst="rect">
+            <a:avLst/>
+          </a:prstGeom>
+          <a:solidFill>
+            <a:srgbClr val="5D1D2E"/>
+          </a:solidFill>
+          <a:ln/>
+        </p:spPr>
+        <p:txBody>
+          <a:bodyPr wrap="square" rtlCol="0" anchor="ctr"/>
+          <a:lstStyle/>
+          <a:p>
+            <a:pPr indent="0" marL="0">
+              <a:buNone/>
+            </a:pPr>
+            <a:endParaRPr lang="en-US" dirty="0"/>
+          </a:p>
+        </p:txBody>
+      </p:sp>
+      <p:sp>
+        <p:nvSpPr>
+          <p:cNvPr id="3" name="Text 1"/>
+          <p:cNvSpPr/>
+          <p:nvPr/>
+        </p:nvSpPr>
+        <p:spPr>
+          <a:xfrm>
+            <a:off x="406301" y="457051"/>
+            <a:ext cx="8498026" cy="274290"/>
+          </a:xfrm>
+          <a:prstGeom prst="rect">
+            <a:avLst/>
+          </a:prstGeom>
+          <a:noFill/>
+          <a:ln/>
+        </p:spPr>
+        <p:txBody>
+          <a:bodyPr wrap="square" lIns="0" tIns="0" rIns="0" bIns="0" rtlCol="0" anchor="t"/>
+          <a:lstStyle/>
+          <a:p>
+            <a:pPr algn="l" indent="0" marL="0">
+              <a:lnSpc>
+                <a:spcPts val="2160"/>
+              </a:lnSpc>
+              <a:spcBef>
+                <a:spcPts val="600"/>
+              </a:spcBef>
+              <a:spcAft>
+                <a:spcPts val="800"/>
+              </a:spcAft>
+              <a:buNone/>
+            </a:pPr>
+            <a:r>
+              <a:rPr lang="en-US" sz="1800" b="1" dirty="0">
+                <a:solidFill>
+                  <a:srgbClr val="997929"/>
+                </a:solidFill>
+                <a:latin typeface="Times New Roman" pitchFamily="34" charset="0"/>
+                <a:ea typeface="Times New Roman" pitchFamily="34" charset="-122"/>
+                <a:cs typeface="Times New Roman" pitchFamily="34" charset="-120"/>
+              </a:rPr>
+              <a:t>Discussion (10 min)</a:t>
+            </a:r>
+            <a:endParaRPr lang="en-US" sz="1800" dirty="0"/>
+          </a:p>
+        </p:txBody>
+      </p:sp>
+      <p:sp>
+        <p:nvSpPr>
+          <p:cNvPr id="4" name="Text 2"/>
+          <p:cNvSpPr/>
+          <p:nvPr/>
+        </p:nvSpPr>
+        <p:spPr>
+          <a:xfrm>
+            <a:off x="634901" y="883593"/>
+            <a:ext cx="8102798" cy="731341"/>
+          </a:xfrm>
+          <a:prstGeom prst="rect">
+            <a:avLst/>
+          </a:prstGeom>
+          <a:noFill/>
+          <a:ln/>
+        </p:spPr>
+        <p:txBody>
+          <a:bodyPr wrap="square" lIns="0" tIns="0" rIns="0" bIns="0" rtlCol="0" anchor="t"/>
+          <a:lstStyle/>
+          <a:p>
+            <a:pPr algn="l" marL="342900" indent="-342900">
+              <a:lnSpc>
+                <a:spcPts val="1620"/>
+              </a:lnSpc>
+              <a:spcAft>
+                <a:spcPts val="300"/>
+              </a:spcAft>
+              <a:buSzPct val="100000"/>
+              <a:buChar char="•"/>
+            </a:pPr>
+            <a:r>
+              <a:rPr lang="en-US" sz="1200" i="1" dirty="0">
+                <a:solidFill>
+                  <a:srgbClr val="1A1A1A"/>
+                </a:solidFill>
+                <a:latin typeface="Georgia" pitchFamily="34" charset="0"/>
+                <a:ea typeface="Georgia" pitchFamily="34" charset="-122"/>
+                <a:cs typeface="Georgia" pitchFamily="34" charset="-120"/>
+              </a:rPr>
+              <a:t>"Is Tridosha 'true' in the same way the periodic table is true? In what way might it be a different kind of framework?"</a:t>
+            </a:r>
+            <a:endParaRPr lang="en-US" sz="1200" dirty="0"/>
+          </a:p>
+          <a:p>
+            <a:pPr algn="l" marL="342900" indent="-342900">
+              <a:lnSpc>
+                <a:spcPts val="1620"/>
+              </a:lnSpc>
+              <a:spcAft>
+                <a:spcPts val="300"/>
+              </a:spcAft>
+              <a:buSzPct val="100000"/>
+              <a:buChar char="•"/>
+            </a:pPr>
+            <a:r>
+              <a:rPr lang="en-US" sz="1200" dirty="0">
+                <a:solidFill>
+                  <a:srgbClr val="1A1A1A"/>
+                </a:solidFill>
+                <a:latin typeface="Georgia" pitchFamily="34" charset="0"/>
+                <a:ea typeface="Georgia" pitchFamily="34" charset="-122"/>
+                <a:cs typeface="Georgia" pitchFamily="34" charset="-120"/>
+              </a:rPr>
+              <a:t>Push toward: clinical typologies (DSM personality types, Sheldon's somatotypes) often have modest biomarker correlates but real clinical utility. Tridosha may be in this category.</a:t>
+            </a:r>
+            <a:endParaRPr lang="en-US" sz="1200" dirty="0"/>
+          </a:p>
+        </p:txBody>
+      </p:sp>
+      <p:sp>
+        <p:nvSpPr>
+          <p:cNvPr id="5" name="Text 3"/>
+          <p:cNvSpPr/>
+          <p:nvPr/>
+        </p:nvSpPr>
+        <p:spPr>
+          <a:xfrm>
+            <a:off x="406301" y="4434929"/>
+            <a:ext cx="8498026" cy="213271"/>
+          </a:xfrm>
+          <a:prstGeom prst="rect">
+            <a:avLst/>
+          </a:prstGeom>
+          <a:noFill/>
+          <a:ln/>
+        </p:spPr>
+        <p:txBody>
+          <a:bodyPr wrap="square" lIns="0" tIns="0" rIns="0" bIns="0" rtlCol="0" anchor="t"/>
+          <a:lstStyle/>
+          <a:p>
+            <a:pPr algn="l" indent="0" marL="0">
+              <a:lnSpc>
+                <a:spcPts val="1680"/>
+              </a:lnSpc>
+              <a:spcBef>
+                <a:spcPts val="300"/>
+              </a:spcBef>
+              <a:spcAft>
+                <a:spcPts val="300"/>
+              </a:spcAft>
+              <a:buNone/>
+            </a:pPr>
+            <a:r>
+              <a:rPr lang="en-US" sz="1200" dirty="0">
+                <a:solidFill>
+                  <a:srgbClr val="1A1A1A"/>
+                </a:solidFill>
+                <a:latin typeface="Georgia" pitchFamily="34" charset="0"/>
+                <a:ea typeface="Georgia" pitchFamily="34" charset="-122"/>
+                <a:cs typeface="Georgia" pitchFamily="34" charset="-120"/>
+              </a:rPr>
+              <a:t>Senior ·  · IKS Curriculum</a:t>
+            </a:r>
+            <a:endParaRPr lang="en-US" sz="1200" dirty="0"/>
+          </a:p>
+        </p:txBody>
+      </p:sp>
+    </p:spTree>
+  </p:cSld>
+  <p:clrMapOvr>
+    <a:masterClrMapping/>
+  </p:clrMapOvr>
+</p:sld>
+</file>
+
+<file path=ppt/slides/slide12.xml><?xml version="1.0" encoding="utf-8"?>
+<p:sld xmlns:a="http://schemas.openxmlformats.org/drawingml/2006/main" xmlns:r="http://schemas.openxmlformats.org/officeDocument/2006/relationships" xmlns:p="http://schemas.openxmlformats.org/presentationml/2006/main">
+  <p:cSld name="Slide 12">
+    <p:bg>
+      <p:bgPr>
+        <a:solidFill>
+          <a:srgbClr val="FAF7F2"/>
+        </a:solidFill>
+      </p:bgPr>
+    </p:bg>
+    <p:spTree>
+      <p:nvGrpSpPr>
+        <p:cNvPr id="1" name=""/>
+        <p:cNvGrpSpPr/>
+        <p:nvPr/>
+      </p:nvGrpSpPr>
+      <p:grpSpPr>
+        <a:xfrm>
+          <a:off x="0" y="0"/>
+          <a:ext cx="0" cy="0"/>
+          <a:chOff x="0" y="0"/>
+          <a:chExt cx="0" cy="0"/>
+        </a:xfrm>
+      </p:grpSpPr>
+      <p:sp>
+        <p:nvSpPr>
+          <p:cNvPr id="2" name="Text 0"/>
+          <p:cNvSpPr/>
+          <p:nvPr/>
+        </p:nvSpPr>
+        <p:spPr>
+          <a:xfrm>
+            <a:off x="0" y="0"/>
+            <a:ext cx="9144000" cy="101501"/>
+          </a:xfrm>
+          <a:prstGeom prst="rect">
+            <a:avLst/>
+          </a:prstGeom>
+          <a:solidFill>
+            <a:srgbClr val="5D1D2E"/>
+          </a:solidFill>
+          <a:ln/>
+        </p:spPr>
+        <p:txBody>
+          <a:bodyPr wrap="square" rtlCol="0" anchor="ctr"/>
+          <a:lstStyle/>
+          <a:p>
+            <a:pPr indent="0" marL="0">
+              <a:buNone/>
+            </a:pPr>
+            <a:endParaRPr lang="en-US" dirty="0"/>
+          </a:p>
+        </p:txBody>
+      </p:sp>
+      <p:sp>
+        <p:nvSpPr>
+          <p:cNvPr id="3" name="Text 1"/>
+          <p:cNvSpPr/>
+          <p:nvPr/>
+        </p:nvSpPr>
+        <p:spPr>
+          <a:xfrm>
+            <a:off x="406301" y="457051"/>
+            <a:ext cx="8498026" cy="274290"/>
+          </a:xfrm>
+          <a:prstGeom prst="rect">
+            <a:avLst/>
+          </a:prstGeom>
+          <a:noFill/>
+          <a:ln/>
+        </p:spPr>
+        <p:txBody>
+          <a:bodyPr wrap="square" lIns="0" tIns="0" rIns="0" bIns="0" rtlCol="0" anchor="t"/>
+          <a:lstStyle/>
+          <a:p>
+            <a:pPr algn="l" indent="0" marL="0">
+              <a:lnSpc>
+                <a:spcPts val="2160"/>
+              </a:lnSpc>
+              <a:spcBef>
+                <a:spcPts val="600"/>
+              </a:spcBef>
+              <a:spcAft>
+                <a:spcPts val="800"/>
+              </a:spcAft>
+              <a:buNone/>
+            </a:pPr>
+            <a:r>
+              <a:rPr lang="en-US" sz="1800" b="1" dirty="0">
+                <a:solidFill>
+                  <a:srgbClr val="997929"/>
+                </a:solidFill>
+                <a:latin typeface="Times New Roman" pitchFamily="34" charset="0"/>
+                <a:ea typeface="Times New Roman" pitchFamily="34" charset="-122"/>
+                <a:cs typeface="Times New Roman" pitchFamily="34" charset="-120"/>
+              </a:rPr>
+              <a:t>Wrap-up (5 min)</a:t>
+            </a:r>
+            <a:endParaRPr lang="en-US" sz="1800" dirty="0"/>
+          </a:p>
+        </p:txBody>
+      </p:sp>
+      <p:sp>
+        <p:nvSpPr>
+          <p:cNvPr id="4" name="Text 2"/>
+          <p:cNvSpPr/>
+          <p:nvPr/>
+        </p:nvSpPr>
+        <p:spPr>
+          <a:xfrm>
+            <a:off x="634901" y="883593"/>
+            <a:ext cx="8102798" cy="281880"/>
+          </a:xfrm>
+          <a:prstGeom prst="rect">
+            <a:avLst/>
+          </a:prstGeom>
+          <a:noFill/>
+          <a:ln/>
+        </p:spPr>
+        <p:txBody>
+          <a:bodyPr wrap="square" lIns="0" tIns="0" rIns="0" bIns="0" rtlCol="0" anchor="t"/>
+          <a:lstStyle/>
+          <a:p>
+            <a:pPr algn="l" marL="342900" indent="-342900">
+              <a:lnSpc>
+                <a:spcPts val="1620"/>
+              </a:lnSpc>
+              <a:spcAft>
+                <a:spcPts val="300"/>
+              </a:spcAft>
+              <a:buSzPct val="100000"/>
+              <a:buChar char="•"/>
+            </a:pPr>
+            <a:r>
+              <a:rPr lang="en-US" sz="1200" dirty="0">
+                <a:solidFill>
+                  <a:srgbClr val="1A1A1A"/>
+                </a:solidFill>
+                <a:latin typeface="Georgia" pitchFamily="34" charset="0"/>
+                <a:ea typeface="Georgia" pitchFamily="34" charset="-122"/>
+                <a:cs typeface="Georgia" pitchFamily="34" charset="-120"/>
+              </a:rPr>
+              <a:t>Preview Day 4: </a:t>
+            </a:r>
+            <a:pPr algn="l" indent="0" marL="0">
+              <a:lnSpc>
+                <a:spcPts val="1620"/>
+              </a:lnSpc>
+              <a:spcAft>
+                <a:spcPts val="300"/>
+              </a:spcAft>
+              <a:buNone/>
+            </a:pPr>
+            <a:r>
+              <a:rPr lang="en-US" sz="1200" i="1" dirty="0">
+                <a:solidFill>
+                  <a:srgbClr val="1A1A1A"/>
+                </a:solidFill>
+                <a:latin typeface="Georgia" pitchFamily="34" charset="0"/>
+                <a:ea typeface="Georgia" pitchFamily="34" charset="-122"/>
+                <a:cs typeface="Georgia" pitchFamily="34" charset="-120"/>
+              </a:rPr>
+              <a:t>"Tomorrow — the broader modern evidence base for Ayurveda."</a:t>
+            </a:r>
+            <a:endParaRPr lang="en-US" sz="1200" dirty="0"/>
+          </a:p>
+        </p:txBody>
+      </p:sp>
+      <p:sp>
+        <p:nvSpPr>
+          <p:cNvPr id="5" name="Text 3"/>
+          <p:cNvSpPr/>
+          <p:nvPr/>
+        </p:nvSpPr>
+        <p:spPr>
+          <a:xfrm>
+            <a:off x="406301" y="4434929"/>
+            <a:ext cx="8498026" cy="213271"/>
+          </a:xfrm>
+          <a:prstGeom prst="rect">
+            <a:avLst/>
+          </a:prstGeom>
+          <a:noFill/>
+          <a:ln/>
+        </p:spPr>
+        <p:txBody>
+          <a:bodyPr wrap="square" lIns="0" tIns="0" rIns="0" bIns="0" rtlCol="0" anchor="t"/>
+          <a:lstStyle/>
+          <a:p>
+            <a:pPr algn="l" indent="0" marL="0">
+              <a:lnSpc>
+                <a:spcPts val="1680"/>
+              </a:lnSpc>
+              <a:spcBef>
+                <a:spcPts val="300"/>
+              </a:spcBef>
+              <a:spcAft>
+                <a:spcPts val="300"/>
+              </a:spcAft>
+              <a:buNone/>
+            </a:pPr>
+            <a:r>
+              <a:rPr lang="en-US" sz="1200" dirty="0">
+                <a:solidFill>
+                  <a:srgbClr val="1A1A1A"/>
+                </a:solidFill>
+                <a:latin typeface="Georgia" pitchFamily="34" charset="0"/>
+                <a:ea typeface="Georgia" pitchFamily="34" charset="-122"/>
+                <a:cs typeface="Georgia" pitchFamily="34" charset="-120"/>
+              </a:rPr>
+              <a:t>Senior ·  · IKS Curriculum</a:t>
+            </a:r>
+            <a:endParaRPr lang="en-US" sz="1200" dirty="0"/>
+          </a:p>
+        </p:txBody>
+      </p:sp>
+    </p:spTree>
+  </p:cSld>
+  <p:clrMapOvr>
+    <a:masterClrMapping/>
+  </p:clrMapOvr>
+</p:sld>
+</file>
+
+<file path=ppt/slides/slide13.xml><?xml version="1.0" encoding="utf-8"?>
+<p:sld xmlns:a="http://schemas.openxmlformats.org/drawingml/2006/main" xmlns:r="http://schemas.openxmlformats.org/officeDocument/2006/relationships" xmlns:p="http://schemas.openxmlformats.org/presentationml/2006/main">
+  <p:cSld name="Slide 13">
+    <p:bg>
+      <p:bgPr>
+        <a:solidFill>
+          <a:srgbClr val="FAF7F2"/>
+        </a:solidFill>
+      </p:bgPr>
+    </p:bg>
+    <p:spTree>
+      <p:nvGrpSpPr>
+        <p:cNvPr id="1" name=""/>
+        <p:cNvGrpSpPr/>
+        <p:nvPr/>
+      </p:nvGrpSpPr>
+      <p:grpSpPr>
+        <a:xfrm>
+          <a:off x="0" y="0"/>
+          <a:ext cx="0" cy="0"/>
+          <a:chOff x="0" y="0"/>
+          <a:chExt cx="0" cy="0"/>
+        </a:xfrm>
+      </p:grpSpPr>
+      <p:sp>
+        <p:nvSpPr>
+          <p:cNvPr id="2" name="Text 0"/>
+          <p:cNvSpPr/>
+          <p:nvPr/>
+        </p:nvSpPr>
+        <p:spPr>
+          <a:xfrm>
+            <a:off x="0" y="0"/>
+            <a:ext cx="9144000" cy="101501"/>
+          </a:xfrm>
+          <a:prstGeom prst="rect">
+            <a:avLst/>
+          </a:prstGeom>
+          <a:solidFill>
+            <a:srgbClr val="5D1D2E"/>
+          </a:solidFill>
+          <a:ln/>
+        </p:spPr>
+        <p:txBody>
+          <a:bodyPr wrap="square" rtlCol="0" anchor="ctr"/>
+          <a:lstStyle/>
+          <a:p>
+            <a:pPr indent="0" marL="0">
+              <a:buNone/>
+            </a:pPr>
+            <a:endParaRPr lang="en-US" dirty="0"/>
+          </a:p>
+        </p:txBody>
+      </p:sp>
+      <p:sp>
+        <p:nvSpPr>
+          <p:cNvPr id="3" name="Text 1"/>
+          <p:cNvSpPr/>
+          <p:nvPr/>
+        </p:nvSpPr>
+        <p:spPr>
+          <a:xfrm>
+            <a:off x="406301" y="457051"/>
+            <a:ext cx="8498026" cy="274290"/>
+          </a:xfrm>
+          <a:prstGeom prst="rect">
+            <a:avLst/>
+          </a:prstGeom>
+          <a:noFill/>
+          <a:ln/>
+        </p:spPr>
+        <p:txBody>
+          <a:bodyPr wrap="square" lIns="0" tIns="0" rIns="0" bIns="0" rtlCol="0" anchor="t"/>
+          <a:lstStyle/>
+          <a:p>
+            <a:pPr algn="l" indent="0" marL="0">
+              <a:lnSpc>
+                <a:spcPts val="2160"/>
+              </a:lnSpc>
+              <a:spcBef>
+                <a:spcPts val="600"/>
+              </a:spcBef>
+              <a:spcAft>
+                <a:spcPts val="800"/>
+              </a:spcAft>
+              <a:buNone/>
+            </a:pPr>
+            <a:r>
+              <a:rPr lang="en-US" sz="1800" b="1" dirty="0">
+                <a:solidFill>
+                  <a:srgbClr val="997929"/>
+                </a:solidFill>
+                <a:latin typeface="Times New Roman" pitchFamily="34" charset="0"/>
+                <a:ea typeface="Times New Roman" pitchFamily="34" charset="-122"/>
+                <a:cs typeface="Times New Roman" pitchFamily="34" charset="-120"/>
+              </a:rPr>
+              <a:t>Differentiation</a:t>
+            </a:r>
+            <a:endParaRPr lang="en-US" sz="1800" dirty="0"/>
+          </a:p>
+        </p:txBody>
+      </p:sp>
+      <p:sp>
+        <p:nvSpPr>
+          <p:cNvPr id="4" name="Text 2"/>
+          <p:cNvSpPr/>
+          <p:nvPr/>
+        </p:nvSpPr>
+        <p:spPr>
+          <a:xfrm>
+            <a:off x="634901" y="883593"/>
+            <a:ext cx="8102798" cy="525661"/>
+          </a:xfrm>
+          <a:prstGeom prst="rect">
+            <a:avLst/>
+          </a:prstGeom>
+          <a:noFill/>
+          <a:ln/>
+        </p:spPr>
+        <p:txBody>
+          <a:bodyPr wrap="square" lIns="0" tIns="0" rIns="0" bIns="0" rtlCol="0" anchor="t"/>
+          <a:lstStyle/>
+          <a:p>
+            <a:pPr algn="l" marL="342900" indent="-342900">
+              <a:lnSpc>
+                <a:spcPts val="1620"/>
+              </a:lnSpc>
+              <a:spcAft>
+                <a:spcPts val="300"/>
+              </a:spcAft>
+              <a:buSzPct val="100000"/>
+              <a:buChar char="•"/>
+            </a:pPr>
+            <a:r>
+              <a:rPr lang="en-US" sz="1200" b="1" dirty="0">
+                <a:solidFill>
+                  <a:srgbClr val="1A1A1A"/>
+                </a:solidFill>
+                <a:latin typeface="Georgia" pitchFamily="34" charset="0"/>
+                <a:ea typeface="Georgia" pitchFamily="34" charset="-122"/>
+                <a:cs typeface="Georgia" pitchFamily="34" charset="-120"/>
+              </a:rPr>
+              <a:t>Tier up:</a:t>
+            </a:r>
+            <a:pPr algn="l" indent="0" marL="0">
+              <a:lnSpc>
+                <a:spcPts val="1620"/>
+              </a:lnSpc>
+              <a:spcAft>
+                <a:spcPts val="300"/>
+              </a:spcAft>
+              <a:buNone/>
+            </a:pPr>
+            <a:r>
+              <a:rPr lang="en-US" sz="1200" dirty="0">
+                <a:solidFill>
+                  <a:srgbClr val="1A1A1A"/>
+                </a:solidFill>
+                <a:latin typeface="Georgia" pitchFamily="34" charset="0"/>
+                <a:ea typeface="Georgia" pitchFamily="34" charset="-122"/>
+                <a:cs typeface="Georgia" pitchFamily="34" charset="-120"/>
+              </a:rPr>
+              <a:t> Read the Prasher et al. (2008) abstract carefully. Critique the methodology.</a:t>
+            </a:r>
+            <a:endParaRPr lang="en-US" sz="1200" dirty="0"/>
+          </a:p>
+          <a:p>
+            <a:pPr algn="l" marL="342900" indent="-342900">
+              <a:lnSpc>
+                <a:spcPts val="1620"/>
+              </a:lnSpc>
+              <a:spcAft>
+                <a:spcPts val="300"/>
+              </a:spcAft>
+              <a:buSzPct val="100000"/>
+              <a:buChar char="•"/>
+            </a:pPr>
+            <a:r>
+              <a:rPr lang="en-US" sz="1200" b="1" dirty="0">
+                <a:solidFill>
+                  <a:srgbClr val="1A1A1A"/>
+                </a:solidFill>
+                <a:latin typeface="Georgia" pitchFamily="34" charset="0"/>
+                <a:ea typeface="Georgia" pitchFamily="34" charset="-122"/>
+                <a:cs typeface="Georgia" pitchFamily="34" charset="-120"/>
+              </a:rPr>
+              <a:t>Tier down:</a:t>
+            </a:r>
+            <a:pPr algn="l" indent="0" marL="0">
+              <a:lnSpc>
+                <a:spcPts val="1620"/>
+              </a:lnSpc>
+              <a:spcAft>
+                <a:spcPts val="300"/>
+              </a:spcAft>
+              <a:buNone/>
+            </a:pPr>
+            <a:r>
+              <a:rPr lang="en-US" sz="1200" dirty="0">
+                <a:solidFill>
+                  <a:srgbClr val="1A1A1A"/>
+                </a:solidFill>
+                <a:latin typeface="Georgia" pitchFamily="34" charset="0"/>
+                <a:ea typeface="Georgia" pitchFamily="34" charset="-122"/>
+                <a:cs typeface="Georgia" pitchFamily="34" charset="-120"/>
+              </a:rPr>
+              <a:t> Focus on classical Tridosha + the framing distinction (clinical vs biomedical).</a:t>
+            </a:r>
+            <a:endParaRPr lang="en-US" sz="1200" dirty="0"/>
+          </a:p>
+        </p:txBody>
+      </p:sp>
+      <p:sp>
+        <p:nvSpPr>
+          <p:cNvPr id="5" name="Text 3"/>
+          <p:cNvSpPr/>
+          <p:nvPr/>
+        </p:nvSpPr>
+        <p:spPr>
+          <a:xfrm>
+            <a:off x="406301" y="4434929"/>
+            <a:ext cx="8498026" cy="213271"/>
+          </a:xfrm>
+          <a:prstGeom prst="rect">
+            <a:avLst/>
+          </a:prstGeom>
+          <a:noFill/>
+          <a:ln/>
+        </p:spPr>
+        <p:txBody>
+          <a:bodyPr wrap="square" lIns="0" tIns="0" rIns="0" bIns="0" rtlCol="0" anchor="t"/>
+          <a:lstStyle/>
+          <a:p>
+            <a:pPr algn="l" indent="0" marL="0">
+              <a:lnSpc>
+                <a:spcPts val="1680"/>
+              </a:lnSpc>
+              <a:spcBef>
+                <a:spcPts val="300"/>
+              </a:spcBef>
+              <a:spcAft>
+                <a:spcPts val="300"/>
+              </a:spcAft>
+              <a:buNone/>
+            </a:pPr>
+            <a:r>
+              <a:rPr lang="en-US" sz="1200" dirty="0">
+                <a:solidFill>
+                  <a:srgbClr val="1A1A1A"/>
+                </a:solidFill>
+                <a:latin typeface="Georgia" pitchFamily="34" charset="0"/>
+                <a:ea typeface="Georgia" pitchFamily="34" charset="-122"/>
+                <a:cs typeface="Georgia" pitchFamily="34" charset="-120"/>
+              </a:rPr>
+              <a:t>Senior ·  · IKS Curriculum</a:t>
+            </a:r>
+            <a:endParaRPr lang="en-US" sz="1200" dirty="0"/>
+          </a:p>
+        </p:txBody>
+      </p:sp>
+    </p:spTree>
+  </p:cSld>
+  <p:clrMapOvr>
+    <a:masterClrMapping/>
+  </p:clrMapOvr>
+</p:sld>
+</file>
+
+<file path=ppt/slides/slide14.xml><?xml version="1.0" encoding="utf-8"?>
+<p:sld xmlns:a="http://schemas.openxmlformats.org/drawingml/2006/main" xmlns:r="http://schemas.openxmlformats.org/officeDocument/2006/relationships" xmlns:p="http://schemas.openxmlformats.org/presentationml/2006/main">
+  <p:cSld name="Slide 14">
+    <p:bg>
+      <p:bgPr>
+        <a:solidFill>
+          <a:srgbClr val="FAF7F2"/>
+        </a:solidFill>
+      </p:bgPr>
+    </p:bg>
+    <p:spTree>
+      <p:nvGrpSpPr>
+        <p:cNvPr id="1" name=""/>
+        <p:cNvGrpSpPr/>
+        <p:nvPr/>
+      </p:nvGrpSpPr>
+      <p:grpSpPr>
+        <a:xfrm>
+          <a:off x="0" y="0"/>
+          <a:ext cx="0" cy="0"/>
+          <a:chOff x="0" y="0"/>
+          <a:chExt cx="0" cy="0"/>
+        </a:xfrm>
+      </p:grpSpPr>
+      <p:sp>
+        <p:nvSpPr>
+          <p:cNvPr id="2" name="Text 0"/>
+          <p:cNvSpPr/>
+          <p:nvPr/>
+        </p:nvSpPr>
+        <p:spPr>
+          <a:xfrm>
+            <a:off x="0" y="0"/>
+            <a:ext cx="9144000" cy="101501"/>
+          </a:xfrm>
+          <a:prstGeom prst="rect">
+            <a:avLst/>
+          </a:prstGeom>
+          <a:solidFill>
+            <a:srgbClr val="5D1D2E"/>
+          </a:solidFill>
+          <a:ln/>
+        </p:spPr>
+        <p:txBody>
+          <a:bodyPr wrap="square" rtlCol="0" anchor="ctr"/>
+          <a:lstStyle/>
+          <a:p>
+            <a:pPr indent="0" marL="0">
+              <a:buNone/>
+            </a:pPr>
+            <a:endParaRPr lang="en-US" dirty="0"/>
+          </a:p>
+        </p:txBody>
+      </p:sp>
+      <p:sp>
+        <p:nvSpPr>
+          <p:cNvPr id="3" name="Text 1"/>
+          <p:cNvSpPr/>
+          <p:nvPr/>
+        </p:nvSpPr>
+        <p:spPr>
+          <a:xfrm>
+            <a:off x="406301" y="457051"/>
+            <a:ext cx="8498026" cy="274290"/>
+          </a:xfrm>
+          <a:prstGeom prst="rect">
+            <a:avLst/>
+          </a:prstGeom>
+          <a:noFill/>
+          <a:ln/>
+        </p:spPr>
+        <p:txBody>
+          <a:bodyPr wrap="square" lIns="0" tIns="0" rIns="0" bIns="0" rtlCol="0" anchor="t"/>
+          <a:lstStyle/>
+          <a:p>
+            <a:pPr algn="l" indent="0" marL="0">
+              <a:lnSpc>
+                <a:spcPts val="2160"/>
+              </a:lnSpc>
+              <a:spcBef>
+                <a:spcPts val="600"/>
+              </a:spcBef>
+              <a:spcAft>
+                <a:spcPts val="800"/>
+              </a:spcAft>
+              <a:buNone/>
+            </a:pPr>
+            <a:r>
+              <a:rPr lang="en-US" sz="1800" b="1" dirty="0">
+                <a:solidFill>
+                  <a:srgbClr val="997929"/>
+                </a:solidFill>
+                <a:latin typeface="Times New Roman" pitchFamily="34" charset="0"/>
+                <a:ea typeface="Times New Roman" pitchFamily="34" charset="-122"/>
+                <a:cs typeface="Times New Roman" pitchFamily="34" charset="-120"/>
+              </a:rPr>
+              <a:t>Teacher notes</a:t>
+            </a:r>
+            <a:endParaRPr lang="en-US" sz="1800" dirty="0"/>
+          </a:p>
+        </p:txBody>
+      </p:sp>
+      <p:sp>
+        <p:nvSpPr>
+          <p:cNvPr id="4" name="Text 2"/>
+          <p:cNvSpPr/>
+          <p:nvPr/>
+        </p:nvSpPr>
+        <p:spPr>
+          <a:xfrm>
+            <a:off x="634901" y="883593"/>
+            <a:ext cx="8102798" cy="525661"/>
+          </a:xfrm>
+          <a:prstGeom prst="rect">
+            <a:avLst/>
+          </a:prstGeom>
+          <a:noFill/>
+          <a:ln/>
+        </p:spPr>
+        <p:txBody>
+          <a:bodyPr wrap="square" lIns="0" tIns="0" rIns="0" bIns="0" rtlCol="0" anchor="t"/>
+          <a:lstStyle/>
+          <a:p>
+            <a:pPr algn="l" marL="342900" indent="-342900">
+              <a:lnSpc>
+                <a:spcPts val="1620"/>
+              </a:lnSpc>
+              <a:spcAft>
+                <a:spcPts val="300"/>
+              </a:spcAft>
+              <a:buSzPct val="100000"/>
+              <a:buChar char="•"/>
+            </a:pPr>
+            <a:r>
+              <a:rPr lang="en-US" sz="1200" dirty="0">
+                <a:solidFill>
+                  <a:srgbClr val="1A1A1A"/>
+                </a:solidFill>
+                <a:latin typeface="Georgia" pitchFamily="34" charset="0"/>
+                <a:ea typeface="Georgia" pitchFamily="34" charset="-122"/>
+                <a:cs typeface="Georgia" pitchFamily="34" charset="-120"/>
+              </a:rPr>
+              <a:t>The Tridosha "is it true?" question doesn't have a clean yes/no. Stay with the framing distinction.</a:t>
+            </a:r>
+            <a:endParaRPr lang="en-US" sz="1200" dirty="0"/>
+          </a:p>
+          <a:p>
+            <a:pPr algn="l" marL="342900" indent="-342900">
+              <a:lnSpc>
+                <a:spcPts val="1620"/>
+              </a:lnSpc>
+              <a:spcAft>
+                <a:spcPts val="300"/>
+              </a:spcAft>
+              <a:buSzPct val="100000"/>
+              <a:buChar char="•"/>
+            </a:pPr>
+            <a:r>
+              <a:rPr lang="en-US" sz="1200" dirty="0">
+                <a:solidFill>
+                  <a:srgbClr val="1A1A1A"/>
+                </a:solidFill>
+                <a:latin typeface="Georgia" pitchFamily="34" charset="0"/>
+                <a:ea typeface="Georgia" pitchFamily="34" charset="-122"/>
+                <a:cs typeface="Georgia" pitchFamily="34" charset="-120"/>
+              </a:rPr>
+              <a:t>Some students will want Tridosha to be either ALL true or ALL false. Both positions are too crude.</a:t>
+            </a:r>
+            <a:endParaRPr lang="en-US" sz="1200" dirty="0"/>
+          </a:p>
+        </p:txBody>
+      </p:sp>
+      <p:sp>
+        <p:nvSpPr>
+          <p:cNvPr id="5" name="Text 3"/>
+          <p:cNvSpPr/>
+          <p:nvPr/>
+        </p:nvSpPr>
+        <p:spPr>
+          <a:xfrm>
+            <a:off x="406301" y="4434929"/>
+            <a:ext cx="8498026" cy="213271"/>
+          </a:xfrm>
+          <a:prstGeom prst="rect">
+            <a:avLst/>
+          </a:prstGeom>
+          <a:noFill/>
+          <a:ln/>
+        </p:spPr>
+        <p:txBody>
+          <a:bodyPr wrap="square" lIns="0" tIns="0" rIns="0" bIns="0" rtlCol="0" anchor="t"/>
+          <a:lstStyle/>
+          <a:p>
+            <a:pPr algn="l" indent="0" marL="0">
+              <a:lnSpc>
+                <a:spcPts val="1680"/>
+              </a:lnSpc>
+              <a:spcBef>
+                <a:spcPts val="300"/>
+              </a:spcBef>
+              <a:spcAft>
+                <a:spcPts val="300"/>
+              </a:spcAft>
+              <a:buNone/>
+            </a:pPr>
+            <a:r>
+              <a:rPr lang="en-US" sz="1200" dirty="0">
+                <a:solidFill>
+                  <a:srgbClr val="1A1A1A"/>
+                </a:solidFill>
+                <a:latin typeface="Georgia" pitchFamily="34" charset="0"/>
+                <a:ea typeface="Georgia" pitchFamily="34" charset="-122"/>
+                <a:cs typeface="Georgia" pitchFamily="34" charset="-120"/>
+              </a:rPr>
+              <a:t>Senior ·  · IKS Curriculum</a:t>
+            </a:r>
+            <a:endParaRPr lang="en-US" sz="1200" dirty="0"/>
+          </a:p>
+        </p:txBody>
+      </p:sp>
+    </p:spTree>
+  </p:cSld>
+  <p:clrMapOvr>
+    <a:masterClrMapping/>
+  </p:clrMapOvr>
+</p:sld>
+</file>
+
+<file path=ppt/slides/slide15.xml><?xml version="1.0" encoding="utf-8"?>
+<p:sld xmlns:a="http://schemas.openxmlformats.org/drawingml/2006/main" xmlns:r="http://schemas.openxmlformats.org/officeDocument/2006/relationships" xmlns:p="http://schemas.openxmlformats.org/presentationml/2006/main">
+  <p:cSld name="Slide 15">
+    <p:bg>
+      <p:bgPr>
+        <a:solidFill>
+          <a:srgbClr val="FAF7F2"/>
+        </a:solidFill>
+      </p:bgPr>
+    </p:bg>
+    <p:spTree>
+      <p:nvGrpSpPr>
+        <p:cNvPr id="1" name=""/>
+        <p:cNvGrpSpPr/>
+        <p:nvPr/>
+      </p:nvGrpSpPr>
+      <p:grpSpPr>
+        <a:xfrm>
+          <a:off x="0" y="0"/>
+          <a:ext cx="0" cy="0"/>
+          <a:chOff x="0" y="0"/>
+          <a:chExt cx="0" cy="0"/>
+        </a:xfrm>
+      </p:grpSpPr>
+      <p:sp>
+        <p:nvSpPr>
+          <p:cNvPr id="2" name="Text 0"/>
+          <p:cNvSpPr/>
+          <p:nvPr/>
+        </p:nvSpPr>
+        <p:spPr>
+          <a:xfrm>
+            <a:off x="0" y="0"/>
+            <a:ext cx="9144000" cy="101501"/>
+          </a:xfrm>
+          <a:prstGeom prst="rect">
+            <a:avLst/>
+          </a:prstGeom>
+          <a:solidFill>
+            <a:srgbClr val="5D1D2E"/>
+          </a:solidFill>
+          <a:ln/>
+        </p:spPr>
+        <p:txBody>
+          <a:bodyPr wrap="square" rtlCol="0" anchor="ctr"/>
+          <a:lstStyle/>
+          <a:p>
+            <a:pPr indent="0" marL="0">
+              <a:buNone/>
+            </a:pPr>
+            <a:endParaRPr lang="en-US" dirty="0"/>
+          </a:p>
+        </p:txBody>
+      </p:sp>
+      <p:sp>
+        <p:nvSpPr>
+          <p:cNvPr id="3" name="Text 1"/>
+          <p:cNvSpPr/>
+          <p:nvPr/>
+        </p:nvSpPr>
+        <p:spPr>
+          <a:xfrm>
+            <a:off x="406301" y="457051"/>
+            <a:ext cx="8498026" cy="274290"/>
+          </a:xfrm>
+          <a:prstGeom prst="rect">
+            <a:avLst/>
+          </a:prstGeom>
+          <a:noFill/>
+          <a:ln/>
+        </p:spPr>
+        <p:txBody>
+          <a:bodyPr wrap="square" lIns="0" tIns="0" rIns="0" bIns="0" rtlCol="0" anchor="t"/>
+          <a:lstStyle/>
+          <a:p>
+            <a:pPr algn="l" indent="0" marL="0">
+              <a:lnSpc>
+                <a:spcPts val="2160"/>
+              </a:lnSpc>
+              <a:spcBef>
+                <a:spcPts val="600"/>
+              </a:spcBef>
+              <a:spcAft>
+                <a:spcPts val="800"/>
+              </a:spcAft>
+              <a:buNone/>
+            </a:pPr>
+            <a:r>
+              <a:rPr lang="en-US" sz="1800" b="1" dirty="0">
+                <a:solidFill>
+                  <a:srgbClr val="997929"/>
+                </a:solidFill>
+                <a:latin typeface="Times New Roman" pitchFamily="34" charset="0"/>
+                <a:ea typeface="Times New Roman" pitchFamily="34" charset="-122"/>
+                <a:cs typeface="Times New Roman" pitchFamily="34" charset="-120"/>
+              </a:rPr>
+              <a:t>Citation(s) used</a:t>
+            </a:r>
+            <a:endParaRPr lang="en-US" sz="1800" dirty="0"/>
+          </a:p>
+        </p:txBody>
+      </p:sp>
+      <p:sp>
+        <p:nvSpPr>
+          <p:cNvPr id="4" name="Text 2"/>
+          <p:cNvSpPr/>
+          <p:nvPr/>
+        </p:nvSpPr>
+        <p:spPr>
+          <a:xfrm>
+            <a:off x="634901" y="883593"/>
+            <a:ext cx="8102798" cy="769441"/>
+          </a:xfrm>
+          <a:prstGeom prst="rect">
+            <a:avLst/>
+          </a:prstGeom>
+          <a:noFill/>
+          <a:ln/>
+        </p:spPr>
+        <p:txBody>
+          <a:bodyPr wrap="square" lIns="0" tIns="0" rIns="0" bIns="0" rtlCol="0" anchor="t"/>
+          <a:lstStyle/>
+          <a:p>
+            <a:pPr algn="l" marL="342900" indent="-342900">
+              <a:lnSpc>
+                <a:spcPts val="1620"/>
+              </a:lnSpc>
+              <a:spcAft>
+                <a:spcPts val="300"/>
+              </a:spcAft>
+              <a:buSzPct val="100000"/>
+              <a:buChar char="•"/>
+            </a:pPr>
+            <a:r>
+              <a:rPr lang="en-US" sz="1200" dirty="0">
+                <a:solidFill>
+                  <a:srgbClr val="1A1A1A"/>
+                </a:solidFill>
+                <a:latin typeface="Georgia" pitchFamily="34" charset="0"/>
+                <a:ea typeface="Georgia" pitchFamily="34" charset="-122"/>
+                <a:cs typeface="Georgia" pitchFamily="34" charset="-120"/>
+              </a:rPr>
+              <a:t>Caraka Sūtra-sthāna 18 on dosha sub-types.</a:t>
+            </a:r>
+            <a:endParaRPr lang="en-US" sz="1200" dirty="0"/>
+          </a:p>
+          <a:p>
+            <a:pPr algn="l" marL="342900" indent="-342900">
+              <a:lnSpc>
+                <a:spcPts val="1620"/>
+              </a:lnSpc>
+              <a:spcAft>
+                <a:spcPts val="300"/>
+              </a:spcAft>
+              <a:buSzPct val="100000"/>
+              <a:buChar char="•"/>
+            </a:pPr>
+            <a:r>
+              <a:rPr lang="en-US" sz="1200" dirty="0">
+                <a:solidFill>
+                  <a:srgbClr val="1A1A1A"/>
+                </a:solidFill>
+                <a:latin typeface="Georgia" pitchFamily="34" charset="0"/>
+                <a:ea typeface="Georgia" pitchFamily="34" charset="-122"/>
+                <a:cs typeface="Georgia" pitchFamily="34" charset="-120"/>
+              </a:rPr>
+              <a:t>Patwardhan (2014). </a:t>
+            </a:r>
+            <a:pPr algn="l" indent="0" marL="0">
+              <a:lnSpc>
+                <a:spcPts val="1620"/>
+              </a:lnSpc>
+              <a:spcAft>
+                <a:spcPts val="300"/>
+              </a:spcAft>
+              <a:buNone/>
+            </a:pPr>
+            <a:r>
+              <a:rPr lang="en-US" sz="1200" i="1" dirty="0">
+                <a:solidFill>
+                  <a:srgbClr val="1A1A1A"/>
+                </a:solidFill>
+                <a:latin typeface="Georgia" pitchFamily="34" charset="0"/>
+                <a:ea typeface="Georgia" pitchFamily="34" charset="-122"/>
+                <a:cs typeface="Georgia" pitchFamily="34" charset="-120"/>
+              </a:rPr>
+              <a:t>EPMA Journal</a:t>
+            </a:r>
+            <a:pPr algn="l" indent="0" marL="0">
+              <a:lnSpc>
+                <a:spcPts val="1620"/>
+              </a:lnSpc>
+              <a:spcAft>
+                <a:spcPts val="300"/>
+              </a:spcAft>
+              <a:buNone/>
+            </a:pPr>
+            <a:r>
+              <a:rPr lang="en-US" sz="1200" dirty="0">
+                <a:solidFill>
+                  <a:srgbClr val="1A1A1A"/>
+                </a:solidFill>
+                <a:latin typeface="Georgia" pitchFamily="34" charset="0"/>
+                <a:ea typeface="Georgia" pitchFamily="34" charset="-122"/>
+                <a:cs typeface="Georgia" pitchFamily="34" charset="-120"/>
+              </a:rPr>
+              <a:t> 5(1), 19.</a:t>
+            </a:r>
+            <a:endParaRPr lang="en-US" sz="1200" dirty="0"/>
+          </a:p>
+          <a:p>
+            <a:pPr algn="l" marL="342900" indent="-342900">
+              <a:lnSpc>
+                <a:spcPts val="1620"/>
+              </a:lnSpc>
+              <a:spcAft>
+                <a:spcPts val="300"/>
+              </a:spcAft>
+              <a:buSzPct val="100000"/>
+              <a:buChar char="•"/>
+            </a:pPr>
+            <a:r>
+              <a:rPr lang="en-US" sz="1200" dirty="0">
+                <a:solidFill>
+                  <a:srgbClr val="1A1A1A"/>
+                </a:solidFill>
+                <a:latin typeface="Georgia" pitchFamily="34" charset="0"/>
+                <a:ea typeface="Georgia" pitchFamily="34" charset="-122"/>
+                <a:cs typeface="Georgia" pitchFamily="34" charset="-120"/>
+              </a:rPr>
+              <a:t>Prasher et al. (2008) on Prakriti genomics (debated).</a:t>
+            </a:r>
+            <a:endParaRPr lang="en-US" sz="1200" dirty="0"/>
+          </a:p>
+        </p:txBody>
+      </p:sp>
+      <p:sp>
+        <p:nvSpPr>
+          <p:cNvPr id="5" name="Text 3"/>
           <p:cNvSpPr/>
           <p:nvPr/>
         </p:nvSpPr>
@@ -2027,7 +4009,7 @@
                 <a:ea typeface="Times New Roman" pitchFamily="34" charset="-122"/>
                 <a:cs typeface="Times New Roman" pitchFamily="34" charset="-120"/>
               </a:rPr>
-              <a:t>Materials</a:t>
+              <a:t>Learning objective</a:t>
             </a:r>
             <a:endParaRPr lang="en-US" sz="1800" dirty="0"/>
           </a:p>
@@ -2075,7 +4057,7 @@
                 <a:ea typeface="Georgia" pitchFamily="34" charset="-122"/>
                 <a:cs typeface="Georgia" pitchFamily="34" charset="-120"/>
               </a:rPr>
-              <a:t>– Tridosha reference table – Printed extract: brief abstract of a study attempting biomarker validation of dosha types (e.g. Bhalerao et al. or similar)</a:t>
+              <a:t>Students articulate the Tridosha framework at classical depth + engage with the modern scholarly literature on its biomedical validity.</a:t>
             </a:r>
             <a:endParaRPr lang="en-US" sz="1200" dirty="0"/>
           </a:p>
@@ -2233,7 +4215,7 @@
                 <a:ea typeface="Times New Roman" pitchFamily="34" charset="-122"/>
                 <a:cs typeface="Times New Roman" pitchFamily="34" charset="-120"/>
               </a:rPr>
-              <a:t>Flow</a:t>
+              <a:t>Materials</a:t>
             </a:r>
             <a:endParaRPr lang="en-US" sz="1800" dirty="0"/>
           </a:p>
@@ -2242,6 +4224,76 @@
       <p:sp>
         <p:nvSpPr>
           <p:cNvPr id="4" name="Text 2"/>
+          <p:cNvSpPr/>
+          <p:nvPr/>
+        </p:nvSpPr>
+        <p:spPr>
+          <a:xfrm>
+            <a:off x="634901" y="883593"/>
+            <a:ext cx="8102798" cy="525661"/>
+          </a:xfrm>
+          <a:prstGeom prst="rect">
+            <a:avLst/>
+          </a:prstGeom>
+          <a:noFill/>
+          <a:ln/>
+        </p:spPr>
+        <p:txBody>
+          <a:bodyPr wrap="square" lIns="0" tIns="0" rIns="0" bIns="0" rtlCol="0" anchor="t"/>
+          <a:lstStyle/>
+          <a:p>
+            <a:pPr algn="l" marL="342900" indent="-342900">
+              <a:lnSpc>
+                <a:spcPts val="1620"/>
+              </a:lnSpc>
+              <a:spcAft>
+                <a:spcPts val="300"/>
+              </a:spcAft>
+              <a:buSzPct val="100000"/>
+              <a:buChar char="•"/>
+            </a:pPr>
+            <a:r>
+              <a:rPr lang="en-US" sz="1200" dirty="0">
+                <a:solidFill>
+                  <a:srgbClr val="1A1A1A"/>
+                </a:solidFill>
+                <a:latin typeface="Georgia" pitchFamily="34" charset="0"/>
+                <a:ea typeface="Georgia" pitchFamily="34" charset="-122"/>
+                <a:cs typeface="Georgia" pitchFamily="34" charset="-120"/>
+              </a:rPr>
+              <a:t>Tridosha reference table</a:t>
+            </a:r>
+            <a:endParaRPr lang="en-US" sz="1200" dirty="0"/>
+          </a:p>
+          <a:p>
+            <a:pPr algn="l" marL="342900" indent="-342900">
+              <a:lnSpc>
+                <a:spcPts val="1620"/>
+              </a:lnSpc>
+              <a:spcAft>
+                <a:spcPts val="300"/>
+              </a:spcAft>
+              <a:buSzPct val="100000"/>
+              <a:buChar char="•"/>
+            </a:pPr>
+            <a:r>
+              <a:rPr lang="en-US" sz="1200" dirty="0">
+                <a:solidFill>
+                  <a:srgbClr val="1A1A1A"/>
+                </a:solidFill>
+                <a:latin typeface="Georgia" pitchFamily="34" charset="0"/>
+                <a:ea typeface="Georgia" pitchFamily="34" charset="-122"/>
+                <a:cs typeface="Georgia" pitchFamily="34" charset="-120"/>
+              </a:rPr>
+              <a:t>Printed extract: brief abstract of a study attempting biomarker validation of dosha types (e.g. Bhalerao et al. or similar)</a:t>
+            </a:r>
+            <a:endParaRPr lang="en-US" sz="1200" dirty="0"/>
+          </a:p>
+        </p:txBody>
+      </p:sp>
+      <p:sp>
+        <p:nvSpPr>
+          <p:cNvPr id="5" name="Text 3"/>
           <p:cNvSpPr/>
           <p:nvPr/>
         </p:nvSpPr>
@@ -2391,7 +4443,7 @@
                 <a:ea typeface="Times New Roman" pitchFamily="34" charset="-122"/>
                 <a:cs typeface="Times New Roman" pitchFamily="34" charset="-120"/>
               </a:rPr>
-              <a:t>Warm-up (5 min)</a:t>
+              <a:t>Flow</a:t>
             </a:r>
             <a:endParaRPr lang="en-US" sz="1800" dirty="0"/>
           </a:p>
@@ -2400,54 +4452,6 @@
       <p:sp>
         <p:nvSpPr>
           <p:cNvPr id="4" name="Text 2"/>
-          <p:cNvSpPr/>
-          <p:nvPr/>
-        </p:nvSpPr>
-        <p:spPr>
-          <a:xfrm>
-            <a:off x="406301" y="870942"/>
-            <a:ext cx="8498026" cy="213271"/>
-          </a:xfrm>
-          <a:prstGeom prst="rect">
-            <a:avLst/>
-          </a:prstGeom>
-          <a:noFill/>
-          <a:ln/>
-        </p:spPr>
-        <p:txBody>
-          <a:bodyPr wrap="square" lIns="0" tIns="0" rIns="0" bIns="0" rtlCol="0" anchor="t"/>
-          <a:lstStyle/>
-          <a:p>
-            <a:pPr algn="l" indent="0" marL="0">
-              <a:lnSpc>
-                <a:spcPts val="1680"/>
-              </a:lnSpc>
-              <a:spcBef>
-                <a:spcPts val="300"/>
-              </a:spcBef>
-              <a:spcAft>
-                <a:spcPts val="300"/>
-              </a:spcAft>
-              <a:buNone/>
-            </a:pPr>
-            <a:r>
-              <a:rPr lang="en-US" sz="1200" dirty="0">
-                <a:solidFill>
-                  <a:srgbClr val="1A1A1A"/>
-                </a:solidFill>
-                <a:latin typeface="Georgia" pitchFamily="34" charset="0"/>
-                <a:ea typeface="Georgia" pitchFamily="34" charset="-122"/>
-                <a:cs typeface="Georgia" pitchFamily="34" charset="-120"/>
-              </a:rPr>
-              <a:t>Recall: 3 doshas with their elemental basis (built from Module 2 Panchabhuta).</a:t>
-            </a:r>
-            <a:endParaRPr lang="en-US" sz="1200" dirty="0"/>
-          </a:p>
-        </p:txBody>
-      </p:sp>
-      <p:sp>
-        <p:nvSpPr>
-          <p:cNvPr id="5" name="Text 3"/>
           <p:cNvSpPr/>
           <p:nvPr/>
         </p:nvSpPr>
@@ -2597,7 +4601,7 @@
                 <a:ea typeface="Times New Roman" pitchFamily="34" charset="-122"/>
                 <a:cs typeface="Times New Roman" pitchFamily="34" charset="-120"/>
               </a:rPr>
-              <a:t>Discussion (10 min)</a:t>
+              <a:t>Warm-up (5 min)</a:t>
             </a:r>
             <a:endParaRPr lang="en-US" sz="1800" dirty="0"/>
           </a:p>
@@ -2611,8 +4615,8 @@
         </p:nvSpPr>
         <p:spPr>
           <a:xfrm>
-            <a:off x="634901" y="883593"/>
-            <a:ext cx="8102798" cy="281880"/>
+            <a:off x="406301" y="870942"/>
+            <a:ext cx="8498026" cy="213271"/>
           </a:xfrm>
           <a:prstGeom prst="rect">
             <a:avLst/>
@@ -2624,26 +4628,28 @@
           <a:bodyPr wrap="square" lIns="0" tIns="0" rIns="0" bIns="0" rtlCol="0" anchor="t"/>
           <a:lstStyle/>
           <a:p>
-            <a:pPr algn="l" marL="342900" indent="-342900">
-              <a:lnSpc>
-                <a:spcPts val="1620"/>
-              </a:lnSpc>
-              <a:spcAft>
-                <a:spcPts val="300"/>
-              </a:spcAft>
-              <a:buSzPct val="100000"/>
-              <a:buChar char="•"/>
-            </a:pPr>
-            <a:r>
-              <a:rPr lang="en-US" sz="1200" i="1" dirty="0">
-                <a:solidFill>
-                  <a:srgbClr val="1A1A1A"/>
-                </a:solidFill>
-                <a:latin typeface="Georgia" pitchFamily="34" charset="0"/>
-                <a:ea typeface="Georgia" pitchFamily="34" charset="-122"/>
-                <a:cs typeface="Georgia" pitchFamily="34" charset="-120"/>
-              </a:rPr>
-              <a:t>"Is Tridosha 'true' in the same way the periodic table is true? In what way might it be a different kind of framework?"</a:t>
+            <a:pPr algn="l" indent="0" marL="0">
+              <a:lnSpc>
+                <a:spcPts val="1680"/>
+              </a:lnSpc>
+              <a:spcBef>
+                <a:spcPts val="300"/>
+              </a:spcBef>
+              <a:spcAft>
+                <a:spcPts val="300"/>
+              </a:spcAft>
+              <a:buNone/>
+            </a:pPr>
+            <a:r>
+              <a:rPr lang="en-US" sz="1200" dirty="0">
+                <a:solidFill>
+                  <a:srgbClr val="1A1A1A"/>
+                </a:solidFill>
+                <a:latin typeface="Georgia" pitchFamily="34" charset="0"/>
+                <a:ea typeface="Georgia" pitchFamily="34" charset="-122"/>
+                <a:cs typeface="Georgia" pitchFamily="34" charset="-120"/>
+              </a:rPr>
+              <a:t>Recall: 3 doshas with their elemental basis (built from Module 2 Panchabhuta).</a:t>
             </a:r>
             <a:endParaRPr lang="en-US" sz="1200" dirty="0"/>
           </a:p>
@@ -2652,54 +4658,6 @@
       <p:sp>
         <p:nvSpPr>
           <p:cNvPr id="5" name="Text 3"/>
-          <p:cNvSpPr/>
-          <p:nvPr/>
-        </p:nvSpPr>
-        <p:spPr>
-          <a:xfrm>
-            <a:off x="406301" y="1254323"/>
-            <a:ext cx="8498026" cy="426541"/>
-          </a:xfrm>
-          <a:prstGeom prst="rect">
-            <a:avLst/>
-          </a:prstGeom>
-          <a:noFill/>
-          <a:ln/>
-        </p:spPr>
-        <p:txBody>
-          <a:bodyPr wrap="square" lIns="0" tIns="0" rIns="0" bIns="0" rtlCol="0" anchor="t"/>
-          <a:lstStyle/>
-          <a:p>
-            <a:pPr algn="l" indent="0" marL="0">
-              <a:lnSpc>
-                <a:spcPts val="1680"/>
-              </a:lnSpc>
-              <a:spcBef>
-                <a:spcPts val="300"/>
-              </a:spcBef>
-              <a:spcAft>
-                <a:spcPts val="300"/>
-              </a:spcAft>
-              <a:buNone/>
-            </a:pPr>
-            <a:r>
-              <a:rPr lang="en-US" sz="1200" dirty="0">
-                <a:solidFill>
-                  <a:srgbClr val="1A1A1A"/>
-                </a:solidFill>
-                <a:latin typeface="Georgia" pitchFamily="34" charset="0"/>
-                <a:ea typeface="Georgia" pitchFamily="34" charset="-122"/>
-                <a:cs typeface="Georgia" pitchFamily="34" charset="-120"/>
-              </a:rPr>
-              <a:t>– Push toward: clinical typologies (DSM personality types, Sheldon's somatotypes) often have modest biomarker correlates but real clinical utility. Tridosha may be in this category.</a:t>
-            </a:r>
-            <a:endParaRPr lang="en-US" sz="1200" dirty="0"/>
-          </a:p>
-        </p:txBody>
-      </p:sp>
-      <p:sp>
-        <p:nvSpPr>
-          <p:cNvPr id="6" name="Text 4"/>
           <p:cNvSpPr/>
           <p:nvPr/>
         </p:nvSpPr>
@@ -2849,7 +4807,7 @@
                 <a:ea typeface="Times New Roman" pitchFamily="34" charset="-122"/>
                 <a:cs typeface="Times New Roman" pitchFamily="34" charset="-120"/>
               </a:rPr>
-              <a:t>Wrap-up (5 min)</a:t>
+              <a:t>Core (25 min)</a:t>
             </a:r>
             <a:endParaRPr lang="en-US" sz="1800" dirty="0"/>
           </a:p>
@@ -2863,8 +4821,8 @@
         </p:nvSpPr>
         <p:spPr>
           <a:xfrm>
-            <a:off x="406301" y="870942"/>
-            <a:ext cx="8498026" cy="213271"/>
+            <a:off x="634901" y="883593"/>
+            <a:ext cx="8102798" cy="281880"/>
           </a:xfrm>
           <a:prstGeom prst="rect">
             <a:avLst/>
@@ -2876,6 +4834,52 @@
           <a:bodyPr wrap="square" lIns="0" tIns="0" rIns="0" bIns="0" rtlCol="0" anchor="t"/>
           <a:lstStyle/>
           <a:p>
+            <a:pPr algn="l" marL="342900" indent="-342900">
+              <a:lnSpc>
+                <a:spcPts val="1620"/>
+              </a:lnSpc>
+              <a:spcAft>
+                <a:spcPts val="300"/>
+              </a:spcAft>
+              <a:buSzPct val="100000"/>
+              <a:buChar char="•"/>
+            </a:pPr>
+            <a:r>
+              <a:rPr lang="en-US" sz="1200" b="1" dirty="0">
+                <a:solidFill>
+                  <a:srgbClr val="1A1A1A"/>
+                </a:solidFill>
+                <a:latin typeface="Georgia" pitchFamily="34" charset="0"/>
+                <a:ea typeface="Georgia" pitchFamily="34" charset="-122"/>
+                <a:cs typeface="Georgia" pitchFamily="34" charset="-120"/>
+              </a:rPr>
+              <a:t>Classical Tridosha (depth):</a:t>
+            </a:r>
+            <a:endParaRPr lang="en-US" sz="1200" dirty="0"/>
+          </a:p>
+        </p:txBody>
+      </p:sp>
+      <p:sp>
+        <p:nvSpPr>
+          <p:cNvPr id="5" name="Text 3"/>
+          <p:cNvSpPr/>
+          <p:nvPr/>
+        </p:nvSpPr>
+        <p:spPr>
+          <a:xfrm>
+            <a:off x="406301" y="1254323"/>
+            <a:ext cx="8498026" cy="213271"/>
+          </a:xfrm>
+          <a:prstGeom prst="rect">
+            <a:avLst/>
+          </a:prstGeom>
+          <a:noFill/>
+          <a:ln/>
+        </p:spPr>
+        <p:txBody>
+          <a:bodyPr wrap="square" lIns="0" tIns="0" rIns="0" bIns="0" rtlCol="0" anchor="t"/>
+          <a:lstStyle/>
+          <a:p>
             <a:pPr algn="l" indent="0" marL="0">
               <a:lnSpc>
                 <a:spcPts val="1680"/>
@@ -2889,29 +4893,6 @@
               <a:buNone/>
             </a:pPr>
             <a:r>
-              <a:rPr lang="en-US" sz="1200" dirty="0">
-                <a:solidFill>
-                  <a:srgbClr val="1A1A1A"/>
-                </a:solidFill>
-                <a:latin typeface="Georgia" pitchFamily="34" charset="0"/>
-                <a:ea typeface="Georgia" pitchFamily="34" charset="-122"/>
-                <a:cs typeface="Georgia" pitchFamily="34" charset="-120"/>
-              </a:rPr>
-              <a:t>– Preview Day 4: </a:t>
-            </a:r>
-            <a:pPr algn="l" indent="0" marL="0">
-              <a:lnSpc>
-                <a:spcPts val="1680"/>
-              </a:lnSpc>
-              <a:spcBef>
-                <a:spcPts val="300"/>
-              </a:spcBef>
-              <a:spcAft>
-                <a:spcPts val="300"/>
-              </a:spcAft>
-              <a:buNone/>
-            </a:pPr>
-            <a:r>
               <a:rPr lang="en-US" sz="1200" i="1" dirty="0">
                 <a:solidFill>
                   <a:srgbClr val="1A1A1A"/>
@@ -2920,7 +4901,7 @@
                 <a:ea typeface="Georgia" pitchFamily="34" charset="-122"/>
                 <a:cs typeface="Georgia" pitchFamily="34" charset="-120"/>
               </a:rPr>
-              <a:t>"Tomorrow — the broader modern evidence base for Ayurveda."</a:t>
+              <a:t>Each row: Dosha · Elements (mahābhūta) · Five sub-types · Primary site · Function.</a:t>
             </a:r>
             <a:endParaRPr lang="en-US" sz="1200" dirty="0"/>
           </a:p>
@@ -2928,7 +4909,7 @@
       </p:sp>
       <p:sp>
         <p:nvSpPr>
-          <p:cNvPr id="5" name="Text 3"/>
+          <p:cNvPr id="6" name="Text 4"/>
           <p:cNvSpPr/>
           <p:nvPr/>
         </p:nvSpPr>
@@ -3078,7 +5059,7 @@
                 <a:ea typeface="Times New Roman" pitchFamily="34" charset="-122"/>
                 <a:cs typeface="Times New Roman" pitchFamily="34" charset="-120"/>
               </a:rPr>
-              <a:t>Differentiation</a:t>
+              <a:t>Core (25 min) (cont.)</a:t>
             </a:r>
             <a:endParaRPr lang="en-US" sz="1800" dirty="0"/>
           </a:p>
@@ -3093,7 +5074,7 @@
         <p:spPr>
           <a:xfrm>
             <a:off x="634901" y="883593"/>
-            <a:ext cx="8102798" cy="525661"/>
+            <a:ext cx="8102798" cy="975122"/>
           </a:xfrm>
           <a:prstGeom prst="rect">
             <a:avLst/>
@@ -3124,7 +5105,7 @@
                 <a:ea typeface="Georgia" pitchFamily="34" charset="-122"/>
                 <a:cs typeface="Georgia" pitchFamily="34" charset="-120"/>
               </a:rPr>
-              <a:t>Tier up:</a:t>
+              <a:t>Vāta</a:t>
             </a:r>
             <a:pPr algn="l" indent="0" marL="0">
               <a:lnSpc>
@@ -3144,7 +5125,7 @@
                 <a:ea typeface="Georgia" pitchFamily="34" charset="-122"/>
                 <a:cs typeface="Georgia" pitchFamily="34" charset="-120"/>
               </a:rPr>
-              <a:t> Read the Prasher et al. (2008) abstract carefully. Critique the methodology.</a:t>
+              <a:t> — ākāśa + vāyu · Prāṇa, Udāna, Samāna, Vyāna, Apāna · Colon (pakvāśaya) · Movement (nerve impulses, breath)</a:t>
             </a:r>
             <a:endParaRPr lang="en-US" sz="1200" dirty="0"/>
           </a:p>
@@ -3168,7 +5149,7 @@
                 <a:ea typeface="Georgia" pitchFamily="34" charset="-122"/>
                 <a:cs typeface="Georgia" pitchFamily="34" charset="-120"/>
               </a:rPr>
-              <a:t>Tier down:</a:t>
+              <a:t>Pitta</a:t>
             </a:r>
             <a:pPr algn="l" indent="0" marL="0">
               <a:lnSpc>
@@ -3188,7 +5169,51 @@
                 <a:ea typeface="Georgia" pitchFamily="34" charset="-122"/>
                 <a:cs typeface="Georgia" pitchFamily="34" charset="-120"/>
               </a:rPr>
-              <a:t> Focus on classical Tridosha + the framing distinction (clinical vs biomedical).</a:t>
+              <a:t> — tejas + ap · Pācaka, Rañjaka, Sādhaka, Ālocaka, Bhrājaka · Small intestine · Transformation (digestion, vision)</a:t>
+            </a:r>
+            <a:endParaRPr lang="en-US" sz="1200" dirty="0"/>
+          </a:p>
+          <a:p>
+            <a:pPr algn="l" marL="342900" indent="-342900">
+              <a:lnSpc>
+                <a:spcPts val="1620"/>
+              </a:lnSpc>
+              <a:spcAft>
+                <a:spcPts val="300"/>
+              </a:spcAft>
+              <a:buSzPct val="100000"/>
+              <a:buChar char="•"/>
+            </a:pPr>
+            <a:r>
+              <a:rPr lang="en-US" sz="1200" b="1" dirty="0">
+                <a:solidFill>
+                  <a:srgbClr val="1A1A1A"/>
+                </a:solidFill>
+                <a:latin typeface="Georgia" pitchFamily="34" charset="0"/>
+                <a:ea typeface="Georgia" pitchFamily="34" charset="-122"/>
+                <a:cs typeface="Georgia" pitchFamily="34" charset="-120"/>
+              </a:rPr>
+              <a:t>Kapha</a:t>
+            </a:r>
+            <a:pPr algn="l" indent="0" marL="0">
+              <a:lnSpc>
+                <a:spcPts val="1620"/>
+              </a:lnSpc>
+              <a:spcAft>
+                <a:spcPts val="300"/>
+              </a:spcAft>
+              <a:buNone/>
+            </a:pPr>
+            <a:r>
+              <a:rPr lang="en-US" sz="1200" dirty="0">
+                <a:solidFill>
+                  <a:srgbClr val="1A1A1A"/>
+                </a:solidFill>
+                <a:latin typeface="Georgia" pitchFamily="34" charset="0"/>
+                <a:ea typeface="Georgia" pitchFamily="34" charset="-122"/>
+                <a:cs typeface="Georgia" pitchFamily="34" charset="-120"/>
+              </a:rPr>
+              <a:t> — ap + pṛthvī · Avalambaka, Kledaka, Bodhaka, Tarpaka, Ślaiṣmaka · Stomach (āmāśaya) · Structure, lubrication, immunity</a:t>
             </a:r>
             <a:endParaRPr lang="en-US" sz="1200" dirty="0"/>
           </a:p>
@@ -3346,7 +5371,7 @@
                 <a:ea typeface="Times New Roman" pitchFamily="34" charset="-122"/>
                 <a:cs typeface="Times New Roman" pitchFamily="34" charset="-120"/>
               </a:rPr>
-              <a:t>Teacher notes</a:t>
+              <a:t>Core (25 min) (cont.)</a:t>
             </a:r>
             <a:endParaRPr lang="en-US" sz="1800" dirty="0"/>
           </a:p>
@@ -3386,6 +5411,29 @@
               <a:buNone/>
             </a:pPr>
             <a:r>
+              <a:rPr lang="en-US" sz="1200" b="1" dirty="0">
+                <a:solidFill>
+                  <a:srgbClr val="1A1A1A"/>
+                </a:solidFill>
+                <a:latin typeface="Georgia" pitchFamily="34" charset="0"/>
+                <a:ea typeface="Georgia" pitchFamily="34" charset="-122"/>
+                <a:cs typeface="Georgia" pitchFamily="34" charset="-120"/>
+              </a:rPr>
+              <a:t>Note:</a:t>
+            </a:r>
+            <a:pPr algn="l" indent="0" marL="0">
+              <a:lnSpc>
+                <a:spcPts val="1680"/>
+              </a:lnSpc>
+              <a:spcBef>
+                <a:spcPts val="300"/>
+              </a:spcBef>
+              <a:spcAft>
+                <a:spcPts val="300"/>
+              </a:spcAft>
+              <a:buNone/>
+            </a:pPr>
+            <a:r>
               <a:rPr lang="en-US" sz="1200" dirty="0">
                 <a:solidFill>
                   <a:srgbClr val="1A1A1A"/>
@@ -3394,7 +5442,7 @@
                 <a:ea typeface="Georgia" pitchFamily="34" charset="-122"/>
                 <a:cs typeface="Georgia" pitchFamily="34" charset="-120"/>
               </a:rPr>
-              <a:t>– The Tridosha "is it true?" question doesn't have a clean yes/no. Stay with the framing distinction. – Some students will want Tridosha to be either ALL true or ALL false. Both positions are too crude.</a:t>
+              <a:t> each dosha has FIVE sub-types with specific anatomical locations. The framework is far more granular than "Vāta = wind."</a:t>
             </a:r>
             <a:endParaRPr lang="en-US" sz="1200" dirty="0"/>
           </a:p>
@@ -3403,6 +5451,186 @@
       <p:sp>
         <p:nvSpPr>
           <p:cNvPr id="5" name="Text 3"/>
+          <p:cNvSpPr/>
+          <p:nvPr/>
+        </p:nvSpPr>
+        <p:spPr>
+          <a:xfrm>
+            <a:off x="634901" y="1386334"/>
+            <a:ext cx="8102798" cy="281880"/>
+          </a:xfrm>
+          <a:prstGeom prst="rect">
+            <a:avLst/>
+          </a:prstGeom>
+          <a:noFill/>
+          <a:ln/>
+        </p:spPr>
+        <p:txBody>
+          <a:bodyPr wrap="square" lIns="0" tIns="0" rIns="0" bIns="0" rtlCol="0" anchor="t"/>
+          <a:lstStyle/>
+          <a:p>
+            <a:pPr algn="l" marL="342900" indent="-342900">
+              <a:lnSpc>
+                <a:spcPts val="1620"/>
+              </a:lnSpc>
+              <a:spcAft>
+                <a:spcPts val="300"/>
+              </a:spcAft>
+              <a:buSzPct val="100000"/>
+              <a:buChar char="•"/>
+            </a:pPr>
+            <a:r>
+              <a:rPr lang="en-US" sz="1200" b="1" dirty="0">
+                <a:solidFill>
+                  <a:srgbClr val="1A1A1A"/>
+                </a:solidFill>
+                <a:latin typeface="Georgia" pitchFamily="34" charset="0"/>
+                <a:ea typeface="Georgia" pitchFamily="34" charset="-122"/>
+                <a:cs typeface="Georgia" pitchFamily="34" charset="-120"/>
+              </a:rPr>
+              <a:t>Prakṛti vs Vikṛti:</a:t>
+            </a:r>
+            <a:endParaRPr lang="en-US" sz="1200" dirty="0"/>
+          </a:p>
+        </p:txBody>
+      </p:sp>
+      <p:sp>
+        <p:nvSpPr>
+          <p:cNvPr id="6" name="Text 4"/>
+          <p:cNvSpPr/>
+          <p:nvPr/>
+        </p:nvSpPr>
+        <p:spPr>
+          <a:xfrm>
+            <a:off x="634901" y="1769715"/>
+            <a:ext cx="8102798" cy="769441"/>
+          </a:xfrm>
+          <a:prstGeom prst="rect">
+            <a:avLst/>
+          </a:prstGeom>
+          <a:noFill/>
+          <a:ln/>
+        </p:spPr>
+        <p:txBody>
+          <a:bodyPr wrap="square" lIns="0" tIns="0" rIns="0" bIns="0" rtlCol="0" anchor="t"/>
+          <a:lstStyle/>
+          <a:p>
+            <a:pPr algn="l" marL="342900" indent="-342900">
+              <a:lnSpc>
+                <a:spcPts val="1620"/>
+              </a:lnSpc>
+              <a:spcAft>
+                <a:spcPts val="300"/>
+              </a:spcAft>
+              <a:buSzPct val="100000"/>
+              <a:buChar char="•"/>
+            </a:pPr>
+            <a:r>
+              <a:rPr lang="en-US" sz="1200" i="1" dirty="0">
+                <a:solidFill>
+                  <a:srgbClr val="1A1A1A"/>
+                </a:solidFill>
+                <a:latin typeface="Georgia" pitchFamily="34" charset="0"/>
+                <a:ea typeface="Georgia" pitchFamily="34" charset="-122"/>
+                <a:cs typeface="Georgia" pitchFamily="34" charset="-120"/>
+              </a:rPr>
+              <a:t>Prakṛti</a:t>
+            </a:r>
+            <a:pPr algn="l" indent="0" marL="0">
+              <a:lnSpc>
+                <a:spcPts val="1620"/>
+              </a:lnSpc>
+              <a:spcAft>
+                <a:spcPts val="300"/>
+              </a:spcAft>
+              <a:buNone/>
+            </a:pPr>
+            <a:r>
+              <a:rPr lang="en-US" sz="1200" dirty="0">
+                <a:solidFill>
+                  <a:srgbClr val="1A1A1A"/>
+                </a:solidFill>
+                <a:latin typeface="Georgia" pitchFamily="34" charset="0"/>
+                <a:ea typeface="Georgia" pitchFamily="34" charset="-122"/>
+                <a:cs typeface="Georgia" pitchFamily="34" charset="-120"/>
+              </a:rPr>
+              <a:t> = constitution (set at birth).</a:t>
+            </a:r>
+            <a:endParaRPr lang="en-US" sz="1200" dirty="0"/>
+          </a:p>
+          <a:p>
+            <a:pPr algn="l" marL="342900" indent="-342900">
+              <a:lnSpc>
+                <a:spcPts val="1620"/>
+              </a:lnSpc>
+              <a:spcAft>
+                <a:spcPts val="300"/>
+              </a:spcAft>
+              <a:buSzPct val="100000"/>
+              <a:buChar char="•"/>
+            </a:pPr>
+            <a:r>
+              <a:rPr lang="en-US" sz="1200" i="1" dirty="0">
+                <a:solidFill>
+                  <a:srgbClr val="1A1A1A"/>
+                </a:solidFill>
+                <a:latin typeface="Georgia" pitchFamily="34" charset="0"/>
+                <a:ea typeface="Georgia" pitchFamily="34" charset="-122"/>
+                <a:cs typeface="Georgia" pitchFamily="34" charset="-120"/>
+              </a:rPr>
+              <a:t>Vikṛti</a:t>
+            </a:r>
+            <a:pPr algn="l" indent="0" marL="0">
+              <a:lnSpc>
+                <a:spcPts val="1620"/>
+              </a:lnSpc>
+              <a:spcAft>
+                <a:spcPts val="300"/>
+              </a:spcAft>
+              <a:buNone/>
+            </a:pPr>
+            <a:r>
+              <a:rPr lang="en-US" sz="1200" dirty="0">
+                <a:solidFill>
+                  <a:srgbClr val="1A1A1A"/>
+                </a:solidFill>
+                <a:latin typeface="Georgia" pitchFamily="34" charset="0"/>
+                <a:ea typeface="Georgia" pitchFamily="34" charset="-122"/>
+                <a:cs typeface="Georgia" pitchFamily="34" charset="-120"/>
+              </a:rPr>
+              <a:t> = current state (can be out of balance).</a:t>
+            </a:r>
+            <a:endParaRPr lang="en-US" sz="1200" dirty="0"/>
+          </a:p>
+          <a:p>
+            <a:pPr algn="l" marL="342900" indent="-342900">
+              <a:lnSpc>
+                <a:spcPts val="1620"/>
+              </a:lnSpc>
+              <a:spcAft>
+                <a:spcPts val="300"/>
+              </a:spcAft>
+              <a:buSzPct val="100000"/>
+              <a:buChar char="•"/>
+            </a:pPr>
+            <a:r>
+              <a:rPr lang="en-US" sz="1200" dirty="0">
+                <a:solidFill>
+                  <a:srgbClr val="1A1A1A"/>
+                </a:solidFill>
+                <a:latin typeface="Georgia" pitchFamily="34" charset="0"/>
+                <a:ea typeface="Georgia" pitchFamily="34" charset="-122"/>
+                <a:cs typeface="Georgia" pitchFamily="34" charset="-120"/>
+              </a:rPr>
+              <a:t>Ayurveda diagnoses vikṛti, prescribes return-to-prakṛti.</a:t>
+            </a:r>
+            <a:endParaRPr lang="en-US" sz="1200" dirty="0"/>
+          </a:p>
+        </p:txBody>
+      </p:sp>
+      <p:sp>
+        <p:nvSpPr>
+          <p:cNvPr id="7" name="Text 5"/>
           <p:cNvSpPr/>
           <p:nvPr/>
         </p:nvSpPr>
@@ -3552,7 +5780,7 @@
                 <a:ea typeface="Times New Roman" pitchFamily="34" charset="-122"/>
                 <a:cs typeface="Times New Roman" pitchFamily="34" charset="-120"/>
               </a:rPr>
-              <a:t>Citation(s) used</a:t>
+              <a:t>Core (25 min) (cont.)</a:t>
             </a:r>
             <a:endParaRPr lang="en-US" sz="1800" dirty="0"/>
           </a:p>
@@ -3566,8 +5794,8 @@
         </p:nvSpPr>
         <p:spPr>
           <a:xfrm>
-            <a:off x="406301" y="870942"/>
-            <a:ext cx="8498026" cy="426541"/>
+            <a:off x="634901" y="883593"/>
+            <a:ext cx="8102798" cy="281880"/>
           </a:xfrm>
           <a:prstGeom prst="rect">
             <a:avLst/>
@@ -3579,13 +5807,77 @@
           <a:bodyPr wrap="square" lIns="0" tIns="0" rIns="0" bIns="0" rtlCol="0" anchor="t"/>
           <a:lstStyle/>
           <a:p>
+            <a:pPr algn="l" marL="342900" indent="-342900">
+              <a:lnSpc>
+                <a:spcPts val="1620"/>
+              </a:lnSpc>
+              <a:spcAft>
+                <a:spcPts val="300"/>
+              </a:spcAft>
+              <a:buSzPct val="100000"/>
+              <a:buChar char="•"/>
+            </a:pPr>
+            <a:r>
+              <a:rPr lang="en-US" sz="1200" b="1" dirty="0">
+                <a:solidFill>
+                  <a:srgbClr val="1A1A1A"/>
+                </a:solidFill>
+                <a:latin typeface="Georgia" pitchFamily="34" charset="0"/>
+                <a:ea typeface="Georgia" pitchFamily="34" charset="-122"/>
+                <a:cs typeface="Georgia" pitchFamily="34" charset="-120"/>
+              </a:rPr>
+              <a:t>The modern scholarly engagement:</a:t>
+            </a:r>
+            <a:endParaRPr lang="en-US" sz="1200" dirty="0"/>
+          </a:p>
+        </p:txBody>
+      </p:sp>
+      <p:sp>
+        <p:nvSpPr>
+          <p:cNvPr id="5" name="Text 3"/>
+          <p:cNvSpPr/>
+          <p:nvPr/>
+        </p:nvSpPr>
+        <p:spPr>
+          <a:xfrm>
+            <a:off x="634901" y="1266974"/>
+            <a:ext cx="8102798" cy="1386483"/>
+          </a:xfrm>
+          <a:prstGeom prst="rect">
+            <a:avLst/>
+          </a:prstGeom>
+          <a:noFill/>
+          <a:ln/>
+        </p:spPr>
+        <p:txBody>
+          <a:bodyPr wrap="square" lIns="0" tIns="0" rIns="0" bIns="0" rtlCol="0" anchor="t"/>
+          <a:lstStyle/>
+          <a:p>
+            <a:pPr algn="l" marL="342900" indent="-342900">
+              <a:lnSpc>
+                <a:spcPts val="1620"/>
+              </a:lnSpc>
+              <a:spcAft>
+                <a:spcPts val="300"/>
+              </a:spcAft>
+              <a:buSzPct val="100000"/>
+              <a:buChar char="•"/>
+            </a:pPr>
+            <a:r>
+              <a:rPr lang="en-US" sz="1200" b="1" dirty="0">
+                <a:solidFill>
+                  <a:srgbClr val="1A1A1A"/>
+                </a:solidFill>
+                <a:latin typeface="Georgia" pitchFamily="34" charset="0"/>
+                <a:ea typeface="Georgia" pitchFamily="34" charset="-122"/>
+                <a:cs typeface="Georgia" pitchFamily="34" charset="-120"/>
+              </a:rPr>
+              <a:t>Prasher et al. (2008).</a:t>
+            </a:r>
             <a:pPr algn="l" indent="0" marL="0">
               <a:lnSpc>
-                <a:spcPts val="1680"/>
-              </a:lnSpc>
-              <a:spcBef>
-                <a:spcPts val="300"/>
-              </a:spcBef>
+                <a:spcPts val="1620"/>
+              </a:lnSpc>
               <a:spcAft>
                 <a:spcPts val="300"/>
               </a:spcAft>
@@ -3600,15 +5892,12 @@
                 <a:ea typeface="Georgia" pitchFamily="34" charset="-122"/>
                 <a:cs typeface="Georgia" pitchFamily="34" charset="-120"/>
               </a:rPr>
-              <a:t>– Caraka Sūtra-sthāna 18 on dosha sub-types. – Patwardhan (2014). </a:t>
+              <a:t> "Genome-wide expression analysis of Prakriti types." Compared gene expression in self-identified Vāta / Pitta / Kapha types. Found </a:t>
             </a:r>
             <a:pPr algn="l" indent="0" marL="0">
               <a:lnSpc>
-                <a:spcPts val="1680"/>
-              </a:lnSpc>
-              <a:spcBef>
-                <a:spcPts val="300"/>
-              </a:spcBef>
+                <a:spcPts val="1620"/>
+              </a:lnSpc>
               <a:spcAft>
                 <a:spcPts val="300"/>
               </a:spcAft>
@@ -3623,15 +5912,12 @@
                 <a:ea typeface="Georgia" pitchFamily="34" charset="-122"/>
                 <a:cs typeface="Georgia" pitchFamily="34" charset="-120"/>
               </a:rPr>
-              <a:t>EPMA Journal</a:t>
+              <a:t>some</a:t>
             </a:r>
             <a:pPr algn="l" indent="0" marL="0">
               <a:lnSpc>
-                <a:spcPts val="1680"/>
-              </a:lnSpc>
-              <a:spcBef>
-                <a:spcPts val="300"/>
-              </a:spcBef>
+                <a:spcPts val="1620"/>
+              </a:lnSpc>
               <a:spcAft>
                 <a:spcPts val="300"/>
               </a:spcAft>
@@ -3646,15 +5932,143 @@
                 <a:ea typeface="Georgia" pitchFamily="34" charset="-122"/>
                 <a:cs typeface="Georgia" pitchFamily="34" charset="-120"/>
               </a:rPr>
-              <a:t> 5(1), 19. – Prasher et al. (2008) on Prakriti genomics (debated).</a:t>
+              <a:t> differences. Replication mixed.</a:t>
             </a:r>
             <a:endParaRPr lang="en-US" sz="1200" dirty="0"/>
           </a:p>
-        </p:txBody>
-      </p:sp>
-      <p:sp>
-        <p:nvSpPr>
-          <p:cNvPr id="5" name="Text 3"/>
+          <a:p>
+            <a:pPr algn="l" marL="342900" indent="-342900">
+              <a:lnSpc>
+                <a:spcPts val="1620"/>
+              </a:lnSpc>
+              <a:spcAft>
+                <a:spcPts val="300"/>
+              </a:spcAft>
+              <a:buSzPct val="100000"/>
+              <a:buChar char="•"/>
+            </a:pPr>
+            <a:r>
+              <a:rPr lang="en-US" sz="1200" b="1" dirty="0">
+                <a:solidFill>
+                  <a:srgbClr val="1A1A1A"/>
+                </a:solidFill>
+                <a:latin typeface="Georgia" pitchFamily="34" charset="0"/>
+                <a:ea typeface="Georgia" pitchFamily="34" charset="-122"/>
+                <a:cs typeface="Georgia" pitchFamily="34" charset="-120"/>
+              </a:rPr>
+              <a:t>Patwardhan (2014).</a:t>
+            </a:r>
+            <a:pPr algn="l" indent="0" marL="0">
+              <a:lnSpc>
+                <a:spcPts val="1620"/>
+              </a:lnSpc>
+              <a:spcAft>
+                <a:spcPts val="300"/>
+              </a:spcAft>
+              <a:buNone/>
+            </a:pPr>
+            <a:r>
+              <a:rPr lang="en-US" sz="1200" dirty="0">
+                <a:solidFill>
+                  <a:srgbClr val="1A1A1A"/>
+                </a:solidFill>
+                <a:latin typeface="Georgia" pitchFamily="34" charset="0"/>
+                <a:ea typeface="Georgia" pitchFamily="34" charset="-122"/>
+                <a:cs typeface="Georgia" pitchFamily="34" charset="-120"/>
+              </a:rPr>
+              <a:t> </a:t>
+            </a:r>
+            <a:pPr algn="l" indent="0" marL="0">
+              <a:lnSpc>
+                <a:spcPts val="1620"/>
+              </a:lnSpc>
+              <a:spcAft>
+                <a:spcPts val="300"/>
+              </a:spcAft>
+              <a:buNone/>
+            </a:pPr>
+            <a:r>
+              <a:rPr lang="en-US" sz="1200" i="1" dirty="0">
+                <a:solidFill>
+                  <a:srgbClr val="1A1A1A"/>
+                </a:solidFill>
+                <a:latin typeface="Georgia" pitchFamily="34" charset="0"/>
+                <a:ea typeface="Georgia" pitchFamily="34" charset="-122"/>
+                <a:cs typeface="Georgia" pitchFamily="34" charset="-120"/>
+              </a:rPr>
+              <a:t>Bridging Ayurveda with evidence-based scientific approaches.</a:t>
+            </a:r>
+            <a:pPr algn="l" indent="0" marL="0">
+              <a:lnSpc>
+                <a:spcPts val="1620"/>
+              </a:lnSpc>
+              <a:spcAft>
+                <a:spcPts val="300"/>
+              </a:spcAft>
+              <a:buNone/>
+            </a:pPr>
+            <a:r>
+              <a:rPr lang="en-US" sz="1200" dirty="0">
+                <a:solidFill>
+                  <a:srgbClr val="1A1A1A"/>
+                </a:solidFill>
+                <a:latin typeface="Georgia" pitchFamily="34" charset="0"/>
+                <a:ea typeface="Georgia" pitchFamily="34" charset="-122"/>
+                <a:cs typeface="Georgia" pitchFamily="34" charset="-120"/>
+              </a:rPr>
+              <a:t> Argues for "Ayurgenomics" — combining Ayurvedic typology with genomic and metabolomic data. Promising; not conclusive.</a:t>
+            </a:r>
+            <a:endParaRPr lang="en-US" sz="1200" dirty="0"/>
+          </a:p>
+          <a:p>
+            <a:pPr algn="l" marL="342900" indent="-342900">
+              <a:lnSpc>
+                <a:spcPts val="1620"/>
+              </a:lnSpc>
+              <a:spcAft>
+                <a:spcPts val="300"/>
+              </a:spcAft>
+              <a:buSzPct val="100000"/>
+              <a:buChar char="•"/>
+            </a:pPr>
+            <a:r>
+              <a:rPr lang="en-US" sz="1200" b="1" dirty="0">
+                <a:solidFill>
+                  <a:srgbClr val="1A1A1A"/>
+                </a:solidFill>
+                <a:latin typeface="Georgia" pitchFamily="34" charset="0"/>
+                <a:ea typeface="Georgia" pitchFamily="34" charset="-122"/>
+                <a:cs typeface="Georgia" pitchFamily="34" charset="-120"/>
+              </a:rPr>
+              <a:t>Critical view:</a:t>
+            </a:r>
+            <a:pPr algn="l" indent="0" marL="0">
+              <a:lnSpc>
+                <a:spcPts val="1620"/>
+              </a:lnSpc>
+              <a:spcAft>
+                <a:spcPts val="300"/>
+              </a:spcAft>
+              <a:buNone/>
+            </a:pPr>
+            <a:r>
+              <a:rPr lang="en-US" sz="1200" dirty="0">
+                <a:solidFill>
+                  <a:srgbClr val="1A1A1A"/>
+                </a:solidFill>
+                <a:latin typeface="Georgia" pitchFamily="34" charset="0"/>
+                <a:ea typeface="Georgia" pitchFamily="34" charset="-122"/>
+                <a:cs typeface="Georgia" pitchFamily="34" charset="-120"/>
+              </a:rPr>
+              <a:t> even the modest published correlations may be confounded by self-identification bias. Dosha typology may correlate with personality traits more than with biomedical biomarkers.</a:t>
+            </a:r>
+            <a:endParaRPr lang="en-US" sz="1200" dirty="0"/>
+          </a:p>
+        </p:txBody>
+      </p:sp>
+      <p:sp>
+        <p:nvSpPr>
+          <p:cNvPr id="6" name="Text 4"/>
           <p:cNvSpPr/>
           <p:nvPr/>
         </p:nvSpPr>
